--- a/ci-benchmark/matched-release/Rust-Optimization-Summary-Published.pptx
+++ b/ci-benchmark/matched-release/Rust-Optimization-Summary-Published.pptx
@@ -4273,6 +4273,14 @@
 <file path=ppt/slides/slide10.xml><?xml version="1.0" encoding="utf-8"?>
 <p:sld xmlns:a="http://schemas.openxmlformats.org/drawingml/2006/main" xmlns:r="http://schemas.openxmlformats.org/officeDocument/2006/relationships" xmlns:p="http://schemas.openxmlformats.org/presentationml/2006/main">
   <p:cSld>
+    <p:bg>
+      <p:bgPr>
+        <a:solidFill>
+          <a:srgbClr val="FFFFFF"/>
+        </a:solidFill>
+        <a:effectLst/>
+      </p:bgPr>
+    </p:bg>
     <p:spTree>
       <p:nvGrpSpPr>
         <p:cNvPr id="1" name=""/>
@@ -4289,6 +4297,579 @@
       </p:grpSpPr>
       <p:sp>
         <p:nvSpPr>
+          <p:cNvPr id="2" name="Title">
+            <a:extLst>
+              <a:ext uri="{FF2B5EF4-FFF2-40B4-BE49-F238E27FC236}">
+                <a16:creationId xmlns:a16="http://schemas.microsoft.com/office/drawing/2014/main" id="{D9269D70-788E-602B-37CD-E93016D5A5BF}"/>
+              </a:ext>
+            </a:extLst>
+          </p:cNvPr>
+          <p:cNvSpPr txBox="1"/>
+          <p:nvPr/>
+        </p:nvSpPr>
+        <p:spPr>
+          <a:xfrm>
+            <a:off x="609600" y="380999"/>
+            <a:ext cx="10972800" cy="584200"/>
+          </a:xfrm>
+          <a:prstGeom prst="rect">
+            <a:avLst/>
+          </a:prstGeom>
+          <a:noFill/>
+        </p:spPr>
+        <p:txBody>
+          <a:bodyPr vert="horz" wrap="square" lIns="0" tIns="0" rIns="0" bIns="0" rtlCol="0">
+            <a:noAutofit/>
+          </a:bodyPr>
+          <a:lstStyle/>
+          <a:p>
+            <a:pPr>
+              <a:spcAft>
+                <a:spcPts val="300"/>
+              </a:spcAft>
+              <a:defRPr sz="2900" b="1">
+                <a:solidFill>
+                  <a:srgbClr val="14324F"/>
+                </a:solidFill>
+                <a:latin typeface="Calibri"/>
+              </a:defRPr>
+            </a:pPr>
+            <a:r>
+              <a:t>Priorities: fix profile-aware caching, then qualify</a:t>
+            </a:r>
+            <a:endParaRPr lang="en-GB" sz="3100" b="1" dirty="0">
+              <a:solidFill>
+                <a:srgbClr val="14324F"/>
+              </a:solidFill>
+              <a:latin typeface="Calibri" panose="020F0502020204030204" pitchFamily="34" charset="0"/>
+            </a:endParaRPr>
+          </a:p>
+        </p:txBody>
+      </p:sp>
+      <p:sp>
+        <p:nvSpPr>
+          <p:cNvPr id="4" name="Rectangle 3">
+            <a:extLst>
+              <a:ext uri="{FF2B5EF4-FFF2-40B4-BE49-F238E27FC236}">
+                <a16:creationId xmlns:a16="http://schemas.microsoft.com/office/drawing/2014/main" id="{A10E80BC-7F79-8413-B483-F42981415F79}"/>
+              </a:ext>
+            </a:extLst>
+          </p:cNvPr>
+          <p:cNvSpPr/>
+          <p:nvPr/>
+        </p:nvSpPr>
+        <p:spPr>
+          <a:xfrm>
+            <a:off x="609600" y="1096254"/>
+            <a:ext cx="10972800" cy="38100"/>
+          </a:xfrm>
+          <a:prstGeom prst="rect">
+            <a:avLst/>
+          </a:prstGeom>
+          <a:solidFill>
+            <a:srgbClr val="007F8B"/>
+          </a:solidFill>
+          <a:ln w="19050" cap="flat" cmpd="sng" algn="ctr">
+            <a:noFill/>
+            <a:prstDash val="solid"/>
+            <a:miter lim="800000"/>
+          </a:ln>
+          <a:effectLst/>
+          <a:extLst>
+            <a:ext uri="{91240B29-F687-4F45-9708-019B960494DF}">
+              <a14:hiddenLine xmlns:a14="http://schemas.microsoft.com/office/drawing/2010/main" w="19050" cap="flat" cmpd="sng" algn="ctr">
+                <a:solidFill>
+                  <a:schemeClr val="accent1">
+                    <a:shade val="15000"/>
+                  </a:schemeClr>
+                </a:solidFill>
+                <a:prstDash val="solid"/>
+                <a:miter lim="800000"/>
+              </a14:hiddenLine>
+            </a:ext>
+          </a:extLst>
+        </p:spPr>
+        <p:style>
+          <a:lnRef idx="2">
+            <a:schemeClr val="accent1">
+              <a:shade val="15000"/>
+            </a:schemeClr>
+          </a:lnRef>
+          <a:fillRef idx="1">
+            <a:schemeClr val="accent1"/>
+          </a:fillRef>
+          <a:effectRef idx="0">
+            <a:schemeClr val="accent1"/>
+          </a:effectRef>
+          <a:fontRef idx="minor">
+            <a:schemeClr val="lt1"/>
+          </a:fontRef>
+        </p:style>
+        <p:txBody>
+          <a:bodyPr rtlCol="0" anchor="ctr"/>
+          <a:lstStyle/>
+          <a:p>
+            <a:pPr algn="ctr"/>
+            <a:endParaRPr lang="en-GB"/>
+          </a:p>
+        </p:txBody>
+      </p:sp>
+      <p:sp>
+        <p:nvSpPr>
+          <p:cNvPr id="5" name="Priorities">
+            <a:extLst>
+              <a:ext uri="{FF2B5EF4-FFF2-40B4-BE49-F238E27FC236}">
+                <a16:creationId xmlns:a16="http://schemas.microsoft.com/office/drawing/2014/main" id="{738DB233-2DA8-E890-5A59-4528F1700761}"/>
+              </a:ext>
+            </a:extLst>
+          </p:cNvPr>
+          <p:cNvSpPr txBox="1"/>
+          <p:nvPr/>
+        </p:nvSpPr>
+        <p:spPr>
+          <a:xfrm>
+            <a:off x="609600" y="1422400"/>
+            <a:ext cx="10972800" cy="2705100"/>
+          </a:xfrm>
+          <a:prstGeom prst="rect">
+            <a:avLst/>
+          </a:prstGeom>
+          <a:noFill/>
+        </p:spPr>
+        <p:txBody>
+          <a:bodyPr vert="horz" wrap="square" lIns="0" tIns="0" rIns="0" bIns="0" rtlCol="0">
+            <a:noAutofit/>
+          </a:bodyPr>
+          <a:lstStyle/>
+          <a:p>
+            <a:pPr>
+              <a:spcAft>
+                <a:spcPts val="300"/>
+              </a:spcAft>
+              <a:defRPr sz="2100" b="0">
+                <a:solidFill>
+                  <a:srgbClr val="14324F"/>
+                </a:solidFill>
+                <a:latin typeface="Calibri"/>
+              </a:defRPr>
+            </a:pPr>
+            <a:pPr>
+              <a:spcAft>
+                <a:spcPts val="300"/>
+              </a:spcAft>
+              <a:defRPr sz="2100" b="0">
+                <a:solidFill>
+                  <a:srgbClr val="14324F"/>
+                </a:solidFill>
+                <a:latin typeface="Calibri"/>
+              </a:defRPr>
+            </a:pPr>
+            <a:r>
+              <a:t>1  Make final LLVM native cache keys profile-aware; demonstrate IronRDP recovery.</a:t>
+            </a:r>
+          </a:p>
+          <a:p>
+            <a:pPr>
+              <a:spcAft>
+                <a:spcPts val="300"/>
+              </a:spcAft>
+              <a:defRPr sz="2100" b="0">
+                <a:solidFill>
+                  <a:srgbClr val="14324F"/>
+                </a:solidFill>
+                <a:latin typeface="Calibri"/>
+              </a:defRPr>
+            </a:pPr>
+            <a:r>
+              <a:t>2  Deliver effective PGO while retaining the Microsoft tool stack.</a:t>
+            </a:r>
+          </a:p>
+          <a:p>
+            <a:pPr>
+              <a:spcAft>
+                <a:spcPts val="300"/>
+              </a:spcAft>
+              <a:defRPr sz="2100" b="0">
+                <a:solidFill>
+                  <a:srgbClr val="14324F"/>
+                </a:solidFill>
+                <a:latin typeface="Calibri"/>
+              </a:defRPr>
+            </a:pPr>
+            <a:r>
+              <a:t>3  Complete the running x64 NVMe 16 / 8 / 4-LP release comparison.</a:t>
+            </a:r>
+          </a:p>
+          <a:p>
+            <a:pPr>
+              <a:spcAft>
+                <a:spcPts val="300"/>
+              </a:spcAft>
+              <a:defRPr sz="2100" b="0">
+                <a:solidFill>
+                  <a:srgbClr val="14324F"/>
+                </a:solidFill>
+                <a:latin typeface="Calibri"/>
+              </a:defRPr>
+            </a:pPr>
+            <a:r>
+              <a:t>4  Reassess Rust-only ThinLTO after the null x64 pilot; Arm64 is unmeasured.</a:t>
+            </a:r>
+          </a:p>
+          <a:p>
+            <a:pPr>
+              <a:spcAft>
+                <a:spcPts val="300"/>
+              </a:spcAft>
+              <a:defRPr sz="2100" b="0">
+                <a:solidFill>
+                  <a:srgbClr val="14324F"/>
+                </a:solidFill>
+                <a:latin typeface="Calibri"/>
+              </a:defRPr>
+            </a:pPr>
+            <a:r>
+              <a:t>5  Optimize packaging and qualify the complete hosted production path.</a:t>
+            </a:r>
+          </a:p>
+        </p:txBody>
+      </p:sp>
+      <p:sp>
+        <p:nvSpPr>
+          <p:cNvPr id="6" name="Conclusion">
+            <a:extLst>
+              <a:ext uri="{FF2B5EF4-FFF2-40B4-BE49-F238E27FC236}">
+                <a16:creationId xmlns:a16="http://schemas.microsoft.com/office/drawing/2014/main" id="{0AA81700-1223-2717-9C99-D48DCB4261EF}"/>
+              </a:ext>
+            </a:extLst>
+          </p:cNvPr>
+          <p:cNvSpPr txBox="1"/>
+          <p:nvPr/>
+        </p:nvSpPr>
+        <p:spPr>
+          <a:xfrm>
+            <a:off x="609600" y="4394200"/>
+            <a:ext cx="10972800" cy="1181100"/>
+          </a:xfrm>
+          <a:prstGeom prst="rect">
+            <a:avLst/>
+          </a:prstGeom>
+          <a:noFill/>
+        </p:spPr>
+        <p:txBody>
+          <a:bodyPr vert="horz" wrap="square" lIns="0" tIns="0" rIns="0" bIns="0" rtlCol="0">
+            <a:noAutofit/>
+          </a:bodyPr>
+          <a:lstStyle/>
+          <a:p>
+            <a:pPr>
+              <a:spcAft>
+                <a:spcPts val="300"/>
+              </a:spcAft>
+              <a:defRPr sz="1800" b="0">
+                <a:solidFill>
+                  <a:srgbClr val="007F8B"/>
+                </a:solidFill>
+                <a:latin typeface="Calibri"/>
+              </a:defRPr>
+            </a:pPr>
+            <a:r>
+              <a:t>Open PRs (30 October): Rust #164707 / #165138; sccache #2962.</a:t>
+            </a:r>
+          </a:p>
+          <a:p>
+            <a:pPr>
+              <a:spcAft>
+                <a:spcPts val="300"/>
+              </a:spcAft>
+              <a:defRPr sz="1800" b="0">
+                <a:solidFill>
+                  <a:srgbClr val="007F8B"/>
+                </a:solidFill>
+                <a:latin typeface="Calibri"/>
+              </a:defRPr>
+            </a:pPr>
+            <a:r>
+              <a:t>The cached upstream job took 2h19m30s; corrected cold-build time is unmeasured.</a:t>
+            </a:r>
+          </a:p>
+          <a:p>
+            <a:pPr>
+              <a:spcAft>
+                <a:spcPts val="300"/>
+              </a:spcAft>
+              <a:defRPr sz="1800" b="0">
+                <a:solidFill>
+                  <a:srgbClr val="007F8B"/>
+                </a:solidFill>
+                <a:latin typeface="Calibri"/>
+              </a:defRPr>
+            </a:pPr>
+            <a:r>
+              <a:t>No claim yet of restored official performance or a qualified sub-six-hour release.</a:t>
+            </a:r>
+          </a:p>
+        </p:txBody>
+      </p:sp>
+      <p:sp>
+        <p:nvSpPr>
+          <p:cNvPr id="9" name="Evidence">
+            <a:hlinkClick r:id="rId2"/>
+            <a:extLst>
+              <a:ext uri="{FF2B5EF4-FFF2-40B4-BE49-F238E27FC236}">
+                <a16:creationId xmlns:a16="http://schemas.microsoft.com/office/drawing/2014/main" id="{F378CBC7-9ED3-A348-8BA2-C7A6609D8883}"/>
+              </a:ext>
+            </a:extLst>
+          </p:cNvPr>
+          <p:cNvSpPr txBox="1"/>
+          <p:nvPr/>
+        </p:nvSpPr>
+        <p:spPr>
+          <a:xfrm>
+            <a:off x="609600" y="6477000"/>
+            <a:ext cx="10414000" cy="228600"/>
+          </a:xfrm>
+          <a:prstGeom prst="rect">
+            <a:avLst/>
+          </a:prstGeom>
+          <a:noFill/>
+        </p:spPr>
+        <p:txBody>
+          <a:bodyPr vert="horz" wrap="square" lIns="0" tIns="0" rIns="0" bIns="0" rtlCol="0">
+            <a:noAutofit/>
+          </a:bodyPr>
+          <a:lstStyle/>
+          <a:p>
+            <a:r>
+              <a:rPr lang="en-US" sz="1000">
+                <a:solidFill>
+                  <a:srgbClr val="506072"/>
+                </a:solidFill>
+                <a:latin typeface="Calibri" panose="020F0502020204030204" pitchFamily="34" charset="0"/>
+              </a:rPr>
+              <a:t>Combined report: methods, detailed tables, qualification caveats and source links</a:t>
+            </a:r>
+            <a:endParaRPr lang="en-GB" sz="1000">
+              <a:solidFill>
+                <a:srgbClr val="506072"/>
+              </a:solidFill>
+              <a:latin typeface="Calibri" panose="020F0502020204030204" pitchFamily="34" charset="0"/>
+            </a:endParaRPr>
+          </a:p>
+        </p:txBody>
+      </p:sp>
+      <p:sp>
+        <p:nvSpPr>
+          <p:cNvPr id="10" name="Slide number">
+            <a:extLst>
+              <a:ext uri="{FF2B5EF4-FFF2-40B4-BE49-F238E27FC236}">
+                <a16:creationId xmlns:a16="http://schemas.microsoft.com/office/drawing/2014/main" id="{69C7B1B7-9211-A806-55BB-C6F259CC6888}"/>
+              </a:ext>
+            </a:extLst>
+          </p:cNvPr>
+          <p:cNvSpPr txBox="1"/>
+          <p:nvPr/>
+        </p:nvSpPr>
+        <p:spPr>
+          <a:xfrm>
+            <a:off x="11150600" y="6477000"/>
+            <a:ext cx="635000" cy="228600"/>
+          </a:xfrm>
+          <a:prstGeom prst="rect">
+            <a:avLst/>
+          </a:prstGeom>
+          <a:noFill/>
+        </p:spPr>
+        <p:txBody>
+          <a:bodyPr vert="horz" wrap="square" lIns="0" tIns="0" rIns="0" bIns="0" rtlCol="0">
+            <a:noAutofit/>
+          </a:bodyPr>
+          <a:lstStyle/>
+          <a:p>
+            <a:pPr>
+              <a:spcAft>
+                <a:spcPts val="300"/>
+              </a:spcAft>
+              <a:defRPr sz="1000" b="0">
+                <a:solidFill>
+                  <a:srgbClr val="506072"/>
+                </a:solidFill>
+                <a:latin typeface="Calibri"/>
+              </a:defRPr>
+            </a:pPr>
+            <a:pPr>
+              <a:spcAft>
+                <a:spcPts val="300"/>
+              </a:spcAft>
+              <a:defRPr sz="1000" b="0">
+                <a:solidFill>
+                  <a:srgbClr val="506072"/>
+                </a:solidFill>
+                <a:latin typeface="Calibri"/>
+              </a:defRPr>
+            </a:pPr>
+            <a:r>
+              <a:rPr sz="1000"/>
+              <a:t>10 / 14</a:t>
+            </a:r>
+          </a:p>
+        </p:txBody>
+      </p:sp>
+      <p:sp>
+        <p:nvSpPr>
+          <p:cNvPr id="11" name="TextBox 10">
+            <a:hlinkClick r:id="rId3"/>
+          </p:cNvPr>
+          <p:cNvSpPr txBox="1"/>
+          <p:nvPr/>
+        </p:nvSpPr>
+        <p:spPr>
+          <a:xfrm>
+            <a:off x="609600" y="5816600"/>
+            <a:ext cx="3302000" cy="317500"/>
+          </a:xfrm>
+          <a:prstGeom prst="rect">
+            <a:avLst/>
+          </a:prstGeom>
+          <a:noFill/>
+        </p:spPr>
+        <p:txBody>
+          <a:bodyPr wrap="square" lIns="0" rIns="0" tIns="0" bIns="0">
+            <a:spAutoFit/>
+          </a:bodyPr>
+          <a:lstStyle/>
+          <a:p>
+            <a:pPr>
+              <a:spcAft>
+                <a:spcPts val="300"/>
+              </a:spcAft>
+              <a:defRPr sz="1600" b="0">
+                <a:solidFill>
+                  <a:srgbClr val="007F8B"/>
+                </a:solidFill>
+                <a:latin typeface="Calibri"/>
+              </a:defRPr>
+            </a:pPr>
+            <a:r>
+              <a:t>Rust #164707</a:t>
+            </a:r>
+          </a:p>
+        </p:txBody>
+      </p:sp>
+      <p:sp>
+        <p:nvSpPr>
+          <p:cNvPr id="12" name="TextBox 11">
+            <a:hlinkClick r:id="rId4"/>
+          </p:cNvPr>
+          <p:cNvSpPr txBox="1"/>
+          <p:nvPr/>
+        </p:nvSpPr>
+        <p:spPr>
+          <a:xfrm>
+            <a:off x="4229100" y="5816600"/>
+            <a:ext cx="3302000" cy="317500"/>
+          </a:xfrm>
+          <a:prstGeom prst="rect">
+            <a:avLst/>
+          </a:prstGeom>
+          <a:noFill/>
+        </p:spPr>
+        <p:txBody>
+          <a:bodyPr wrap="square" lIns="0" rIns="0" tIns="0" bIns="0">
+            <a:spAutoFit/>
+          </a:bodyPr>
+          <a:lstStyle/>
+          <a:p>
+            <a:pPr>
+              <a:spcAft>
+                <a:spcPts val="300"/>
+              </a:spcAft>
+              <a:defRPr sz="1600" b="0">
+                <a:solidFill>
+                  <a:srgbClr val="007F8B"/>
+                </a:solidFill>
+                <a:latin typeface="Calibri"/>
+              </a:defRPr>
+            </a:pPr>
+            <a:r>
+              <a:t>Rust #165138</a:t>
+            </a:r>
+          </a:p>
+        </p:txBody>
+      </p:sp>
+      <p:sp>
+        <p:nvSpPr>
+          <p:cNvPr id="13" name="TextBox 12">
+            <a:hlinkClick r:id="rId5"/>
+          </p:cNvPr>
+          <p:cNvSpPr txBox="1"/>
+          <p:nvPr/>
+        </p:nvSpPr>
+        <p:spPr>
+          <a:xfrm>
+            <a:off x="7848600" y="5816600"/>
+            <a:ext cx="3302000" cy="317500"/>
+          </a:xfrm>
+          <a:prstGeom prst="rect">
+            <a:avLst/>
+          </a:prstGeom>
+          <a:noFill/>
+        </p:spPr>
+        <p:txBody>
+          <a:bodyPr wrap="square" lIns="0" rIns="0" tIns="0" bIns="0">
+            <a:spAutoFit/>
+          </a:bodyPr>
+          <a:lstStyle/>
+          <a:p>
+            <a:pPr>
+              <a:spcAft>
+                <a:spcPts val="300"/>
+              </a:spcAft>
+              <a:defRPr sz="1600" b="0">
+                <a:solidFill>
+                  <a:srgbClr val="007F8B"/>
+                </a:solidFill>
+                <a:latin typeface="Calibri"/>
+              </a:defRPr>
+            </a:pPr>
+            <a:r>
+              <a:t>sccache #2962</a:t>
+            </a:r>
+          </a:p>
+        </p:txBody>
+      </p:sp>
+    </p:spTree>
+    <p:extLst>
+      <p:ext uri="{BB962C8B-B14F-4D97-AF65-F5344CB8AC3E}">
+        <p14:creationId xmlns:p14="http://schemas.microsoft.com/office/powerpoint/2010/main" val="967713318"/>
+      </p:ext>
+    </p:extLst>
+  </p:cSld>
+  <p:clrMapOvr>
+    <a:masterClrMapping/>
+  </p:clrMapOvr>
+</p:sld>
+</file>
+
+<file path=ppt/slides/slide11.xml><?xml version="1.0" encoding="utf-8"?>
+<p:sld xmlns:a="http://schemas.openxmlformats.org/drawingml/2006/main" xmlns:r="http://schemas.openxmlformats.org/officeDocument/2006/relationships" xmlns:p="http://schemas.openxmlformats.org/presentationml/2006/main">
+  <p:cSld>
+    <p:spTree>
+      <p:nvGrpSpPr>
+        <p:cNvPr id="1" name=""/>
+        <p:cNvGrpSpPr/>
+        <p:nvPr/>
+      </p:nvGrpSpPr>
+      <p:grpSpPr>
+        <a:xfrm>
+          <a:off x="0" y="0"/>
+          <a:ext cx="0" cy="0"/>
+          <a:chOff x="0" y="0"/>
+          <a:chExt cx="0" cy="0"/>
+        </a:xfrm>
+      </p:grpSpPr>
+      <p:sp>
+        <p:nvSpPr>
           <p:cNvPr id="2" name="TextBox 1">
             <a:extLst>
               <a:ext uri="{FF2B5EF4-FFF2-40B4-BE49-F238E27FC236}">
@@ -4412,7 +4993,7 @@
 </p:sld>
 </file>
 
-<file path=ppt/slides/slide11.xml><?xml version="1.0" encoding="utf-8"?>
+<file path=ppt/slides/slide12.xml><?xml version="1.0" encoding="utf-8"?>
 <p:sld xmlns:a="http://schemas.openxmlformats.org/drawingml/2006/main" xmlns:r="http://schemas.openxmlformats.org/officeDocument/2006/relationships" xmlns:p="http://schemas.openxmlformats.org/presentationml/2006/main">
   <p:cSld>
     <p:bg>
@@ -5518,7 +6099,7 @@
 </p:sld>
 </file>
 
-<file path=ppt/slides/slide12.xml><?xml version="1.0" encoding="utf-8"?>
+<file path=ppt/slides/slide13.xml><?xml version="1.0" encoding="utf-8"?>
 <p:sld xmlns:a="http://schemas.openxmlformats.org/drawingml/2006/main" xmlns:r="http://schemas.openxmlformats.org/officeDocument/2006/relationships" xmlns:p="http://schemas.openxmlformats.org/presentationml/2006/main">
   <p:cSld name="Reports: overview and compiler evidence">
     <p:bg>
@@ -6749,7 +7330,7 @@
 </p:sld>
 </file>
 
-<file path=ppt/slides/slide13.xml><?xml version="1.0" encoding="utf-8"?>
+<file path=ppt/slides/slide14.xml><?xml version="1.0" encoding="utf-8"?>
 <p:sld xmlns:a="http://schemas.openxmlformats.org/drawingml/2006/main" xmlns:r="http://schemas.openxmlformats.org/officeDocument/2006/relationships" xmlns:p="http://schemas.openxmlformats.org/presentationml/2006/main">
   <p:cSld name="Reports: release production and supporting evidence">
     <p:bg>
@@ -7964,706 +8545,6 @@
 </p:sld>
 </file>
 
-<file path=ppt/slides/slide14.xml><?xml version="1.0" encoding="utf-8"?>
-<p:sld xmlns:a="http://schemas.openxmlformats.org/drawingml/2006/main" xmlns:p="http://schemas.openxmlformats.org/presentationml/2006/main" xmlns:r="http://schemas.openxmlformats.org/officeDocument/2006/relationships">
-  <p:cSld>
-    <p:spTree>
-      <p:nvGrpSpPr>
-        <p:cNvPr id="1" name=""/>
-        <p:cNvGrpSpPr/>
-        <p:nvPr/>
-      </p:nvGrpSpPr>
-      <p:grpSpPr/>
-      <p:sp>
-        <p:nvSpPr>
-          <p:cNvPr id="2" name="TextBox 1"/>
-          <p:cNvSpPr txBox="1"/>
-          <p:nvPr/>
-        </p:nvSpPr>
-        <p:spPr>
-          <a:xfrm>
-            <a:off x="609600" y="381000"/>
-            <a:ext cx="10972800" cy="609600"/>
-          </a:xfrm>
-          <a:prstGeom prst="rect">
-            <a:avLst/>
-          </a:prstGeom>
-          <a:noFill/>
-        </p:spPr>
-        <p:txBody>
-          <a:bodyPr wrap="square" lIns="0" rIns="0" tIns="0" bIns="0">
-            <a:spAutoFit/>
-          </a:bodyPr>
-          <a:lstStyle/>
-          <a:p>
-            <a:pPr>
-              <a:spcAft>
-                <a:spcPts val="300"/>
-              </a:spcAft>
-              <a:defRPr sz="2800" b="1">
-                <a:solidFill>
-                  <a:srgbClr val="14324F"/>
-                </a:solidFill>
-                <a:latin typeface="Calibri"/>
-              </a:defRPr>
-            </a:pPr>
-            <a:pPr>
-              <a:spcAft>
-                <a:spcPts val="300"/>
-              </a:spcAft>
-              <a:defRPr sz="2800" b="1">
-                <a:solidFill>
-                  <a:srgbClr val="14324F"/>
-                </a:solidFill>
-                <a:latin typeface="Calibri"/>
-              </a:defRPr>
-            </a:pPr>
-            <a:r>
-              <a:rPr sz="2800"/>
-              <a:t>Rust-only ThinLTO: no incremental IronRDP wall gain</a:t>
-            </a:r>
-          </a:p>
-        </p:txBody>
-      </p:sp>
-      <p:sp>
-        <p:nvSpPr>
-          <p:cNvPr id="3" name="TextBox 2"/>
-          <p:cNvSpPr txBox="1"/>
-          <p:nvPr/>
-        </p:nvSpPr>
-        <p:spPr>
-          <a:xfrm>
-            <a:off x="609600" y="1079500"/>
-            <a:ext cx="10972800" cy="482600"/>
-          </a:xfrm>
-          <a:prstGeom prst="rect">
-            <a:avLst/>
-          </a:prstGeom>
-          <a:noFill/>
-        </p:spPr>
-        <p:txBody>
-          <a:bodyPr wrap="square" lIns="0" rIns="0" tIns="0" bIns="0">
-            <a:spAutoFit/>
-          </a:bodyPr>
-          <a:lstStyle/>
-          <a:p>
-            <a:pPr>
-              <a:spcAft>
-                <a:spcPts val="300"/>
-              </a:spcAft>
-              <a:defRPr sz="1500" b="0">
-                <a:solidFill>
-                  <a:srgbClr val="506072"/>
-                </a:solidFill>
-                <a:latin typeface="Calibri"/>
-              </a:defRPr>
-            </a:pPr>
-            <a:pPr>
-              <a:spcAft>
-                <a:spcPts val="300"/>
-              </a:spcAft>
-              <a:defRPr sz="1500" b="0">
-                <a:solidFill>
-                  <a:srgbClr val="506072"/>
-                </a:solidFill>
-                <a:latin typeface="Calibri"/>
-              </a:defRPr>
-            </a:pPr>
-            <a:r>
-              <a:rPr sz="1500"/>
-              <a:t>Repaired frozen PGO; Microsoft native tools retained; only Rust thin-local -&gt; thin changes.</a:t>
-            </a:r>
-          </a:p>
-        </p:txBody>
-      </p:sp>
-      <p:graphicFrame>
-        <p:nvGraphicFramePr>
-          <p:cNvPr id="4" name="Table 3"/>
-          <p:cNvGraphicFramePr>
-            <a:graphicFrameLocks noGrp="1"/>
-          </p:cNvGraphicFramePr>
-          <p:nvPr/>
-        </p:nvGraphicFramePr>
-        <p:xfrm>
-          <a:off x="609600" y="1752600"/>
-          <a:ext cx="10972800" cy="2336800"/>
-        </p:xfrm>
-        <a:graphic>
-          <a:graphicData uri="http://schemas.openxmlformats.org/drawingml/2006/table">
-            <a:tbl>
-              <a:tblPr firstRow="1" bandRow="1">
-                <a:tableStyleId>{5C22544A-7EE6-4342-B048-85BDC9FD1C3A}</a:tableStyleId>
-              </a:tblPr>
-              <a:tblGrid>
-                <a:gridCol w="4318000"/>
-                <a:gridCol w="3352800"/>
-                <a:gridCol w="3302000"/>
-              </a:tblGrid>
-              <a:tr h="584200">
-                <a:tc>
-                  <a:txBody>
-                    <a:bodyPr/>
-                    <a:lstStyle/>
-                    <a:p>
-                      <a:pPr>
-                        <a:defRPr sz="1700" b="1">
-                          <a:solidFill>
-                            <a:srgbClr val="FFFFFF"/>
-                          </a:solidFill>
-                          <a:latin typeface="Calibri"/>
-                        </a:defRPr>
-                      </a:pPr>
-                      <a:r>
-                        <a:t>Three rounds, mean per block</a:t>
-                      </a:r>
-                    </a:p>
-                  </a:txBody>
-                  <a:tcPr marL="101600" marR="76200" marT="50800" marB="50800" anchor="ctr">
-                    <a:solidFill>
-                      <a:srgbClr val="14324F"/>
-                    </a:solidFill>
-                  </a:tcPr>
-                </a:tc>
-                <a:tc>
-                  <a:txBody>
-                    <a:bodyPr/>
-                    <a:lstStyle/>
-                    <a:p>
-                      <a:pPr>
-                        <a:defRPr sz="1700" b="1">
-                          <a:solidFill>
-                            <a:srgbClr val="FFFFFF"/>
-                          </a:solidFill>
-                          <a:latin typeface="Calibri"/>
-                        </a:defRPr>
-                      </a:pPr>
-                      <a:r>
-                        <a:t>Repaired PGO</a:t>
-                      </a:r>
-                    </a:p>
-                  </a:txBody>
-                  <a:tcPr marL="101600" marR="76200" marT="50800" marB="50800" anchor="ctr">
-                    <a:solidFill>
-                      <a:srgbClr val="14324F"/>
-                    </a:solidFill>
-                  </a:tcPr>
-                </a:tc>
-                <a:tc>
-                  <a:txBody>
-                    <a:bodyPr/>
-                    <a:lstStyle/>
-                    <a:p>
-                      <a:pPr>
-                        <a:defRPr sz="1700" b="1">
-                          <a:solidFill>
-                            <a:srgbClr val="FFFFFF"/>
-                          </a:solidFill>
-                          <a:latin typeface="Calibri"/>
-                        </a:defRPr>
-                      </a:pPr>
-                      <a:r>
-                        <a:t>+ Rust-only ThinLTO</a:t>
-                      </a:r>
-                    </a:p>
-                  </a:txBody>
-                  <a:tcPr marL="101600" marR="76200" marT="50800" marB="50800" anchor="ctr">
-                    <a:solidFill>
-                      <a:srgbClr val="14324F"/>
-                    </a:solidFill>
-                  </a:tcPr>
-                </a:tc>
-              </a:tr>
-              <a:tr h="584200">
-                <a:tc>
-                  <a:txBody>
-                    <a:bodyPr/>
-                    <a:lstStyle/>
-                    <a:p>
-                      <a:pPr>
-                        <a:defRPr sz="1700">
-                          <a:solidFill>
-                            <a:srgbClr val="14324F"/>
-                          </a:solidFill>
-                          <a:latin typeface="Calibri"/>
-                        </a:defRPr>
-                      </a:pPr>
-                      <a:r>
-                        <a:t>IronRDP offline wall seconds</a:t>
-                      </a:r>
-                    </a:p>
-                  </a:txBody>
-                  <a:tcPr marL="101600" marR="76200" marT="50800" marB="50800" anchor="ctr">
-                    <a:solidFill>
-                      <a:srgbClr val="EFF4F7"/>
-                    </a:solidFill>
-                  </a:tcPr>
-                </a:tc>
-                <a:tc>
-                  <a:txBody>
-                    <a:bodyPr/>
-                    <a:lstStyle/>
-                    <a:p>
-                      <a:pPr>
-                        <a:defRPr sz="1700">
-                          <a:solidFill>
-                            <a:srgbClr val="14324F"/>
-                          </a:solidFill>
-                          <a:latin typeface="Calibri"/>
-                        </a:defRPr>
-                      </a:pPr>
-                      <a:r>
-                        <a:t>812.586</a:t>
-                      </a:r>
-                    </a:p>
-                  </a:txBody>
-                  <a:tcPr marL="101600" marR="76200" marT="50800" marB="50800" anchor="ctr">
-                    <a:solidFill>
-                      <a:srgbClr val="EFF4F7"/>
-                    </a:solidFill>
-                  </a:tcPr>
-                </a:tc>
-                <a:tc>
-                  <a:txBody>
-                    <a:bodyPr/>
-                    <a:lstStyle/>
-                    <a:p>
-                      <a:pPr>
-                        <a:defRPr sz="1700">
-                          <a:solidFill>
-                            <a:srgbClr val="14324F"/>
-                          </a:solidFill>
-                          <a:latin typeface="Calibri"/>
-                        </a:defRPr>
-                      </a:pPr>
-                      <a:r>
-                        <a:t>812.961 (0.05% slower)</a:t>
-                      </a:r>
-                    </a:p>
-                  </a:txBody>
-                  <a:tcPr marL="101600" marR="76200" marT="50800" marB="50800" anchor="ctr">
-                    <a:solidFill>
-                      <a:srgbClr val="EFF4F7"/>
-                    </a:solidFill>
-                  </a:tcPr>
-                </a:tc>
-              </a:tr>
-              <a:tr h="584200">
-                <a:tc>
-                  <a:txBody>
-                    <a:bodyPr/>
-                    <a:lstStyle/>
-                    <a:p>
-                      <a:pPr>
-                        <a:defRPr sz="1700">
-                          <a:solidFill>
-                            <a:srgbClr val="14324F"/>
-                          </a:solidFill>
-                          <a:latin typeface="Calibri"/>
-                        </a:defRPr>
-                      </a:pPr>
-                      <a:r>
-                        <a:t>Descendant CPU seconds</a:t>
-                      </a:r>
-                    </a:p>
-                  </a:txBody>
-                  <a:tcPr marL="101600" marR="76200" marT="50800" marB="50800" anchor="ctr">
-                    <a:solidFill>
-                      <a:srgbClr val="FFFFFF"/>
-                    </a:solidFill>
-                  </a:tcPr>
-                </a:tc>
-                <a:tc>
-                  <a:txBody>
-                    <a:bodyPr/>
-                    <a:lstStyle/>
-                    <a:p>
-                      <a:pPr>
-                        <a:defRPr sz="1700">
-                          <a:solidFill>
-                            <a:srgbClr val="14324F"/>
-                          </a:solidFill>
-                          <a:latin typeface="Calibri"/>
-                        </a:defRPr>
-                      </a:pPr>
-                      <a:r>
-                        <a:t>3141.375</a:t>
-                      </a:r>
-                    </a:p>
-                  </a:txBody>
-                  <a:tcPr marL="101600" marR="76200" marT="50800" marB="50800" anchor="ctr">
-                    <a:solidFill>
-                      <a:srgbClr val="FFFFFF"/>
-                    </a:solidFill>
-                  </a:tcPr>
-                </a:tc>
-                <a:tc>
-                  <a:txBody>
-                    <a:bodyPr/>
-                    <a:lstStyle/>
-                    <a:p>
-                      <a:pPr>
-                        <a:defRPr sz="1700">
-                          <a:solidFill>
-                            <a:srgbClr val="14324F"/>
-                          </a:solidFill>
-                          <a:latin typeface="Calibri"/>
-                        </a:defRPr>
-                      </a:pPr>
-                      <a:r>
-                        <a:t>3130.063 (0.36% less)</a:t>
-                      </a:r>
-                    </a:p>
-                  </a:txBody>
-                  <a:tcPr marL="101600" marR="76200" marT="50800" marB="50800" anchor="ctr">
-                    <a:solidFill>
-                      <a:srgbClr val="FFFFFF"/>
-                    </a:solidFill>
-                  </a:tcPr>
-                </a:tc>
-              </a:tr>
-              <a:tr h="584200">
-                <a:tc>
-                  <a:txBody>
-                    <a:bodyPr/>
-                    <a:lstStyle/>
-                    <a:p>
-                      <a:pPr>
-                        <a:defRPr sz="1700">
-                          <a:solidFill>
-                            <a:srgbClr val="14324F"/>
-                          </a:solidFill>
-                          <a:latin typeface="Calibri"/>
-                        </a:defRPr>
-                      </a:pPr>
-                      <a:r>
-                        <a:t>Paired wall reductions</a:t>
-                      </a:r>
-                    </a:p>
-                  </a:txBody>
-                  <a:tcPr marL="101600" marR="76200" marT="50800" marB="50800" anchor="ctr">
-                    <a:solidFill>
-                      <a:srgbClr val="EFF4F7"/>
-                    </a:solidFill>
-                  </a:tcPr>
-                </a:tc>
-                <a:tc>
-                  <a:txBody>
-                    <a:bodyPr/>
-                    <a:lstStyle/>
-                    <a:p>
-                      <a:pPr>
-                        <a:defRPr sz="1700">
-                          <a:solidFill>
-                            <a:srgbClr val="14324F"/>
-                          </a:solidFill>
-                          <a:latin typeface="Calibri"/>
-                        </a:defRPr>
-                      </a:pPr>
-                      <a:r>
-                        <a:t>0.69%, 0.05%, -0.88%</a:t>
-                      </a:r>
-                    </a:p>
-                  </a:txBody>
-                  <a:tcPr marL="101600" marR="76200" marT="50800" marB="50800" anchor="ctr">
-                    <a:solidFill>
-                      <a:srgbClr val="EFF4F7"/>
-                    </a:solidFill>
-                  </a:tcPr>
-                </a:tc>
-                <a:tc>
-                  <a:txBody>
-                    <a:bodyPr/>
-                    <a:lstStyle/>
-                    <a:p>
-                      <a:pPr>
-                        <a:defRPr sz="1700">
-                          <a:solidFill>
-                            <a:srgbClr val="14324F"/>
-                          </a:solidFill>
-                          <a:latin typeface="Calibri"/>
-                        </a:defRPr>
-                      </a:pPr>
-                      <a:r>
-                        <a:t>No meaningful wall gain</a:t>
-                      </a:r>
-                    </a:p>
-                  </a:txBody>
-                  <a:tcPr marL="101600" marR="76200" marT="50800" marB="50800" anchor="ctr">
-                    <a:solidFill>
-                      <a:srgbClr val="EFF4F7"/>
-                    </a:solidFill>
-                  </a:tcPr>
-                </a:tc>
-              </a:tr>
-            </a:tbl>
-          </a:graphicData>
-        </a:graphic>
-      </p:graphicFrame>
-      <p:sp>
-        <p:nvSpPr>
-          <p:cNvPr id="5" name="TextBox 4"/>
-          <p:cNvSpPr txBox="1"/>
-          <p:nvPr/>
-        </p:nvSpPr>
-        <p:spPr>
-          <a:xfrm>
-            <a:off x="609600" y="4508500"/>
-            <a:ext cx="10972800" cy="457200"/>
-          </a:xfrm>
-          <a:prstGeom prst="rect">
-            <a:avLst/>
-          </a:prstGeom>
-          <a:noFill/>
-        </p:spPr>
-        <p:txBody>
-          <a:bodyPr wrap="square" lIns="0" rIns="0" tIns="0" bIns="0">
-            <a:spAutoFit/>
-          </a:bodyPr>
-          <a:lstStyle/>
-          <a:p>
-            <a:pPr>
-              <a:spcAft>
-                <a:spcPts val="300"/>
-              </a:spcAft>
-              <a:defRPr sz="2100" b="1">
-                <a:solidFill>
-                  <a:srgbClr val="007F8B"/>
-                </a:solidFill>
-                <a:latin typeface="Calibri"/>
-              </a:defRPr>
-            </a:pPr>
-            <a:pPr>
-              <a:spcAft>
-                <a:spcPts val="300"/>
-              </a:spcAft>
-              <a:defRPr sz="2100" b="1">
-                <a:solidFill>
-                  <a:srgbClr val="007F8B"/>
-                </a:solidFill>
-                <a:latin typeface="Calibri"/>
-              </a:defRPr>
-            </a:pPr>
-            <a:r>
-              <a:rPr sz="2000"/>
-              <a:t>One build pair / one consumer VM: descriptive, not a population estimate.</a:t>
-            </a:r>
-          </a:p>
-        </p:txBody>
-      </p:sp>
-      <p:sp>
-        <p:nvSpPr>
-          <p:cNvPr id="6" name="TextBox 5"/>
-          <p:cNvSpPr txBox="1"/>
-          <p:nvPr/>
-        </p:nvSpPr>
-        <p:spPr>
-          <a:xfrm>
-            <a:off x="609600" y="5105400"/>
-            <a:ext cx="10972800" cy="1193800"/>
-          </a:xfrm>
-          <a:prstGeom prst="rect">
-            <a:avLst/>
-          </a:prstGeom>
-          <a:noFill/>
-        </p:spPr>
-        <p:txBody>
-          <a:bodyPr wrap="square" lIns="0" rIns="0" tIns="0" bIns="0">
-            <a:spAutoFit/>
-          </a:bodyPr>
-          <a:lstStyle/>
-          <a:p>
-            <a:pPr>
-              <a:spcAft>
-                <a:spcPts val="300"/>
-              </a:spcAft>
-              <a:defRPr sz="1800" b="0">
-                <a:solidFill>
-                  <a:srgbClr val="14324F"/>
-                </a:solidFill>
-                <a:latin typeface="Calibri"/>
-              </a:defRPr>
-            </a:pPr>
-            <a:pPr>
-              <a:spcAft>
-                <a:spcPts val="300"/>
-              </a:spcAft>
-              <a:defRPr sz="1800" b="0">
-                <a:solidFill>
-                  <a:srgbClr val="14324F"/>
-                </a:solidFill>
-                <a:latin typeface="Calibri"/>
-              </a:defRPr>
-            </a:pPr>
-            <a:r>
-              <a:rPr sz="1700"/>
-              <a:t>Native correctness passed for both arms; fresh targets and alternating order.</a:t>
-            </a:r>
-          </a:p>
-          <a:p>
-            <a:pPr>
-              <a:spcAft>
-                <a:spcPts val="300"/>
-              </a:spcAft>
-              <a:defRPr sz="1800" b="0">
-                <a:solidFill>
-                  <a:srgbClr val="14324F"/>
-                </a:solidFill>
-                <a:latin typeface="Calibri"/>
-              </a:defRPr>
-            </a:pPr>
-            <a:r>
-              <a:rPr sz="1700"/>
-              <a:t>Common Cargo; own stdlib with verified identical runtime bytes; no compiler cache.</a:t>
-            </a:r>
-          </a:p>
-          <a:p>
-            <a:pPr>
-              <a:spcAft>
-                <a:spcPts val="300"/>
-              </a:spcAft>
-              <a:defRPr sz="1800" b="0">
-                <a:solidFill>
-                  <a:srgbClr val="14324F"/>
-                </a:solidFill>
-                <a:latin typeface="Calibri"/>
-              </a:defRPr>
-            </a:pPr>
-            <a:r>
-              <a:rPr sz="1700"/>
-              <a:t>Compiler/sysroot pilot only: no full-release or doctest qualification.</a:t>
-            </a:r>
-          </a:p>
-          <a:p>
-            <a:pPr>
-              <a:spcAft>
-                <a:spcPts val="300"/>
-              </a:spcAft>
-              <a:defRPr sz="1800" b="0">
-                <a:solidFill>
-                  <a:srgbClr val="14324F"/>
-                </a:solidFill>
-                <a:latin typeface="Calibri"/>
-              </a:defRPr>
-            </a:pPr>
-            <a:r>
-              <a:rPr sz="1700"/>
-              <a:t>The earlier 7.6% result also enabled LLVM ThinLTO and changed native linking.</a:t>
-            </a:r>
-          </a:p>
-        </p:txBody>
-      </p:sp>
-      <p:sp>
-        <p:nvSpPr>
-          <p:cNvPr id="7" name="TextBox 6">
-            <a:hlinkClick r:id="rId2"/>
-          </p:cNvPr>
-          <p:cNvSpPr txBox="1"/>
-          <p:nvPr/>
-        </p:nvSpPr>
-        <p:spPr>
-          <a:xfrm>
-            <a:off x="609600" y="6477000"/>
-            <a:ext cx="10287000" cy="215900"/>
-          </a:xfrm>
-          <a:prstGeom prst="rect">
-            <a:avLst/>
-          </a:prstGeom>
-          <a:noFill/>
-        </p:spPr>
-        <p:txBody>
-          <a:bodyPr wrap="square" lIns="0" rIns="0" tIns="0" bIns="0">
-            <a:spAutoFit/>
-          </a:bodyPr>
-          <a:lstStyle/>
-          <a:p>
-            <a:pPr>
-              <a:spcAft>
-                <a:spcPts val="300"/>
-              </a:spcAft>
-              <a:defRPr sz="1000" b="0">
-                <a:solidFill>
-                  <a:srgbClr val="506072"/>
-                </a:solidFill>
-                <a:latin typeface="Calibri"/>
-              </a:defRPr>
-            </a:pPr>
-            <a:pPr>
-              <a:spcAft>
-                <a:spcPts val="300"/>
-              </a:spcAft>
-              <a:defRPr sz="1000" b="0">
-                <a:solidFill>
-                  <a:srgbClr val="506072"/>
-                </a:solidFill>
-                <a:latin typeface="Calibri"/>
-              </a:defRPr>
-            </a:pPr>
-            <a:r>
-              <a:rPr sz="1000"/>
-              <a:t>Completed consumer 41076640207; detailed results and raw evidence: X64-RUST-THIN-INCREMENTAL.md</a:t>
-            </a:r>
-          </a:p>
-        </p:txBody>
-      </p:sp>
-      <p:sp>
-        <p:nvSpPr>
-          <p:cNvPr id="8" name="TextBox 7"/>
-          <p:cNvSpPr txBox="1"/>
-          <p:nvPr/>
-        </p:nvSpPr>
-        <p:spPr>
-          <a:xfrm>
-            <a:off x="11150600" y="6477000"/>
-            <a:ext cx="698500" cy="228600"/>
-          </a:xfrm>
-          <a:prstGeom prst="rect">
-            <a:avLst/>
-          </a:prstGeom>
-          <a:noFill/>
-        </p:spPr>
-        <p:txBody>
-          <a:bodyPr wrap="square" lIns="0" rIns="0" tIns="0" bIns="0">
-            <a:spAutoFit/>
-          </a:bodyPr>
-          <a:lstStyle/>
-          <a:p>
-            <a:pPr>
-              <a:spcAft>
-                <a:spcPts val="300"/>
-              </a:spcAft>
-              <a:defRPr sz="1000" b="0">
-                <a:solidFill>
-                  <a:srgbClr val="506072"/>
-                </a:solidFill>
-                <a:latin typeface="Calibri"/>
-              </a:defRPr>
-            </a:pPr>
-            <a:pPr>
-              <a:spcAft>
-                <a:spcPts val="300"/>
-              </a:spcAft>
-              <a:defRPr sz="1000" b="0">
-                <a:solidFill>
-                  <a:srgbClr val="506072"/>
-                </a:solidFill>
-                <a:latin typeface="Calibri"/>
-              </a:defRPr>
-            </a:pPr>
-            <a:r>
-              <a:rPr sz="1000"/>
-              <a:t>3 / 14</a:t>
-            </a:r>
-          </a:p>
-        </p:txBody>
-      </p:sp>
-    </p:spTree>
-  </p:cSld>
-  <p:clrMapOvr>
-    <a:masterClrMapping/>
-  </p:clrMapOvr>
-</p:sld>
-</file>
-
 <file path=ppt/slides/slide2.xml><?xml version="1.0" encoding="utf-8"?>
 <p:sld xmlns:a="http://schemas.openxmlformats.org/drawingml/2006/main" xmlns:r="http://schemas.openxmlformats.org/officeDocument/2006/relationships" xmlns:p="http://schemas.openxmlformats.org/presentationml/2006/main">
   <p:cSld>
@@ -9619,14 +9500,6 @@
 <file path=ppt/slides/slide3.xml><?xml version="1.0" encoding="utf-8"?>
 <p:sld xmlns:a="http://schemas.openxmlformats.org/drawingml/2006/main" xmlns:p="http://schemas.openxmlformats.org/presentationml/2006/main" xmlns:r="http://schemas.openxmlformats.org/officeDocument/2006/relationships">
   <p:cSld>
-    <p:bg>
-      <p:bgPr>
-        <a:solidFill>
-          <a:srgbClr val="FFFFFF"/>
-        </a:solidFill>
-        <a:effectLst/>
-      </p:bgPr>
-    </p:bg>
     <p:spTree>
       <p:nvGrpSpPr>
         <p:cNvPr id="1" name=""/>
@@ -9667,8 +9540,20 @@
                 <a:latin typeface="Calibri"/>
               </a:defRPr>
             </a:pPr>
-            <a:r>
-              <a:t>Later x64 studies: benefit and production cost differ</a:t>
+            <a:pPr>
+              <a:spcAft>
+                <a:spcPts val="300"/>
+              </a:spcAft>
+              <a:defRPr sz="2800" b="1">
+                <a:solidFill>
+                  <a:srgbClr val="14324F"/>
+                </a:solidFill>
+                <a:latin typeface="Calibri"/>
+              </a:defRPr>
+            </a:pPr>
+            <a:r>
+              <a:rPr sz="2800"/>
+              <a:t>Rust-only ThinLTO: no incremental IronRDP wall gain</a:t>
             </a:r>
           </a:p>
         </p:txBody>
@@ -9706,8 +9591,20 @@
                 <a:latin typeface="Calibri"/>
               </a:defRPr>
             </a:pPr>
-            <a:r>
-              <a:t>Keep each control and workload explicit; do not combine percentages across experiments.</a:t>
+            <a:pPr>
+              <a:spcAft>
+                <a:spcPts val="300"/>
+              </a:spcAft>
+              <a:defRPr sz="1500" b="0">
+                <a:solidFill>
+                  <a:srgbClr val="506072"/>
+                </a:solidFill>
+                <a:latin typeface="Calibri"/>
+              </a:defRPr>
+            </a:pPr>
+            <a:r>
+              <a:rPr sz="1500"/>
+              <a:t>Repaired frozen PGO; Microsoft native tools retained; only Rust thin-local -&gt; thin changes.</a:t>
             </a:r>
           </a:p>
         </p:txBody>
@@ -9750,7 +9647,7 @@
                         </a:defRPr>
                       </a:pPr>
                       <a:r>
-                        <a:t>Comparison</a:t>
+                        <a:t>Three rounds, mean per block</a:t>
                       </a:r>
                     </a:p>
                   </a:txBody>
@@ -9774,7 +9671,7 @@
                         </a:defRPr>
                       </a:pPr>
                       <a:r>
-                        <a:t>Measured endpoint</a:t>
+                        <a:t>Repaired PGO</a:t>
                       </a:r>
                     </a:p>
                   </a:txBody>
@@ -9798,7 +9695,7 @@
                         </a:defRPr>
                       </a:pPr>
                       <a:r>
-                        <a:t>Result</a:t>
+                        <a:t>+ Rust-only ThinLTO</a:t>
                       </a:r>
                     </a:p>
                   </a:txBody>
@@ -9816,15 +9713,15 @@
                     <a:lstStyle/>
                     <a:p>
                       <a:pPr>
-                        <a:defRPr sz="1800" b="0">
-                          <a:solidFill>
-                            <a:srgbClr val="14324F"/>
-                          </a:solidFill>
-                          <a:latin typeface="Calibri"/>
-                        </a:defRPr>
-                      </a:pPr>
-                      <a:r>
-                        <a:t>Fresh artifact vs shipping Rust</a:t>
+                        <a:defRPr sz="1700">
+                          <a:solidFill>
+                            <a:srgbClr val="14324F"/>
+                          </a:solidFill>
+                          <a:latin typeface="Calibri"/>
+                        </a:defRPr>
+                      </a:pPr>
+                      <a:r>
+                        <a:t>IronRDP offline wall seconds</a:t>
                       </a:r>
                     </a:p>
                   </a:txBody>
@@ -9840,15 +9737,15 @@
                     <a:lstStyle/>
                     <a:p>
                       <a:pPr>
-                        <a:defRPr sz="1800" b="0">
-                          <a:solidFill>
-                            <a:srgbClr val="14324F"/>
-                          </a:solidFill>
-                          <a:latin typeface="Calibri"/>
-                        </a:defRPr>
-                      </a:pPr>
-                      <a:r>
-                        <a:t>IronRDP offline wall</a:t>
+                        <a:defRPr sz="1700">
+                          <a:solidFill>
+                            <a:srgbClr val="14324F"/>
+                          </a:solidFill>
+                          <a:latin typeface="Calibri"/>
+                        </a:defRPr>
+                      </a:pPr>
+                      <a:r>
+                        <a:t>812.586</a:t>
                       </a:r>
                     </a:p>
                   </a:txBody>
@@ -9864,15 +9761,15 @@
                     <a:lstStyle/>
                     <a:p>
                       <a:pPr>
-                        <a:defRPr sz="1800" b="0">
-                          <a:solidFill>
-                            <a:srgbClr val="14324F"/>
-                          </a:solidFill>
-                          <a:latin typeface="Calibri"/>
-                        </a:defRPr>
-                      </a:pPr>
-                      <a:r>
-                        <a:t>18.0% less (15.0-20.8%)</a:t>
+                        <a:defRPr sz="1700">
+                          <a:solidFill>
+                            <a:srgbClr val="14324F"/>
+                          </a:solidFill>
+                          <a:latin typeface="Calibri"/>
+                        </a:defRPr>
+                      </a:pPr>
+                      <a:r>
+                        <a:t>812.961 (0.05% slower)</a:t>
                       </a:r>
                     </a:p>
                   </a:txBody>
@@ -9890,15 +9787,15 @@
                     <a:lstStyle/>
                     <a:p>
                       <a:pPr>
-                        <a:defRPr sz="1800" b="0">
-                          <a:solidFill>
-                            <a:srgbClr val="14324F"/>
-                          </a:solidFill>
-                          <a:latin typeface="Calibri"/>
-                        </a:defRPr>
-                      </a:pPr>
-                      <a:r>
-                        <a:t>Same artifact vs upstream rebuild</a:t>
+                        <a:defRPr sz="1700">
+                          <a:solidFill>
+                            <a:srgbClr val="14324F"/>
+                          </a:solidFill>
+                          <a:latin typeface="Calibri"/>
+                        </a:defRPr>
+                      </a:pPr>
+                      <a:r>
+                        <a:t>Descendant CPU seconds</a:t>
                       </a:r>
                     </a:p>
                   </a:txBody>
@@ -9914,15 +9811,15 @@
                     <a:lstStyle/>
                     <a:p>
                       <a:pPr>
-                        <a:defRPr sz="1800" b="0">
-                          <a:solidFill>
-                            <a:srgbClr val="14324F"/>
-                          </a:solidFill>
-                          <a:latin typeface="Calibri"/>
-                        </a:defRPr>
-                      </a:pPr>
-                      <a:r>
-                        <a:t>IronRDP offline wall</a:t>
+                        <a:defRPr sz="1700">
+                          <a:solidFill>
+                            <a:srgbClr val="14324F"/>
+                          </a:solidFill>
+                          <a:latin typeface="Calibri"/>
+                        </a:defRPr>
+                      </a:pPr>
+                      <a:r>
+                        <a:t>3141.375</a:t>
                       </a:r>
                     </a:p>
                   </a:txBody>
@@ -9938,15 +9835,15 @@
                     <a:lstStyle/>
                     <a:p>
                       <a:pPr>
-                        <a:defRPr sz="1800" b="0">
-                          <a:solidFill>
-                            <a:srgbClr val="14324F"/>
-                          </a:solidFill>
-                          <a:latin typeface="Calibri"/>
-                        </a:defRPr>
-                      </a:pPr>
-                      <a:r>
-                        <a:t>20.9% less (18.1-23.4%)</a:t>
+                        <a:defRPr sz="1700">
+                          <a:solidFill>
+                            <a:srgbClr val="14324F"/>
+                          </a:solidFill>
+                          <a:latin typeface="Calibri"/>
+                        </a:defRPr>
+                      </a:pPr>
+                      <a:r>
+                        <a:t>3130.063 (0.36% less)</a:t>
                       </a:r>
                     </a:p>
                   </a:txBody>
@@ -9964,15 +9861,15 @@
                     <a:lstStyle/>
                     <a:p>
                       <a:pPr>
-                        <a:defRPr sz="1800" b="0">
-                          <a:solidFill>
-                            <a:srgbClr val="14324F"/>
-                          </a:solidFill>
-                          <a:latin typeface="Calibri"/>
-                        </a:defRPr>
-                      </a:pPr>
-                      <a:r>
-                        <a:t>Two opposite-order release pairs</a:t>
+                        <a:defRPr sz="1700">
+                          <a:solidFill>
+                            <a:srgbClr val="14324F"/>
+                          </a:solidFill>
+                          <a:latin typeface="Calibri"/>
+                        </a:defRPr>
+                      </a:pPr>
+                      <a:r>
+                        <a:t>Paired wall reductions</a:t>
                       </a:r>
                     </a:p>
                   </a:txBody>
@@ -9988,15 +9885,15 @@
                     <a:lstStyle/>
                     <a:p>
                       <a:pPr>
-                        <a:defRPr sz="1800" b="0">
-                          <a:solidFill>
-                            <a:srgbClr val="14324F"/>
-                          </a:solidFill>
-                          <a:latin typeface="Calibri"/>
-                        </a:defRPr>
-                      </a:pPr>
-                      <a:r>
-                        <a:t>Rust production / whole job</a:t>
+                        <a:defRPr sz="1700">
+                          <a:solidFill>
+                            <a:srgbClr val="14324F"/>
+                          </a:solidFill>
+                          <a:latin typeface="Calibri"/>
+                        </a:defRPr>
+                      </a:pPr>
+                      <a:r>
+                        <a:t>0.69%, 0.05%, -0.88%</a:t>
                       </a:r>
                     </a:p>
                   </a:txBody>
@@ -10012,15 +9909,15 @@
                     <a:lstStyle/>
                     <a:p>
                       <a:pPr>
-                        <a:defRPr sz="1800" b="0">
-                          <a:solidFill>
-                            <a:srgbClr val="14324F"/>
-                          </a:solidFill>
-                          <a:latin typeface="Calibri"/>
-                        </a:defRPr>
-                      </a:pPr>
-                      <a:r>
-                        <a:t>2.71% / 4.00% more</a:t>
+                        <a:defRPr sz="1700">
+                          <a:solidFill>
+                            <a:srgbClr val="14324F"/>
+                          </a:solidFill>
+                          <a:latin typeface="Calibri"/>
+                        </a:defRPr>
+                      </a:pPr>
+                      <a:r>
+                        <a:t>No meaningful wall gain</a:t>
                       </a:r>
                     </a:p>
                   </a:txBody>
@@ -10068,8 +9965,20 @@
                 <a:latin typeface="Calibri"/>
               </a:defRPr>
             </a:pPr>
-            <a:r>
-              <a:t>These are not the isolated 13.73% / 12.93% LLVM-profile estimates.</a:t>
+            <a:pPr>
+              <a:spcAft>
+                <a:spcPts val="300"/>
+              </a:spcAft>
+              <a:defRPr sz="2100" b="1">
+                <a:solidFill>
+                  <a:srgbClr val="007F8B"/>
+                </a:solidFill>
+                <a:latin typeface="Calibri"/>
+              </a:defRPr>
+            </a:pPr>
+            <a:r>
+              <a:rPr sz="2000"/>
+              <a:t>One build pair / one consumer VM: descriptive, not a population estimate.</a:t>
             </a:r>
           </a:p>
         </p:txBody>
@@ -10107,11 +10016,6 @@
                 <a:latin typeface="Calibri"/>
               </a:defRPr>
             </a:pPr>
-            <a:r>
-              <a:t>Five independent standard Windows VMs; intervals resample paired VMs.</a:t>
-            </a:r>
-          </a:p>
-          <a:p>
             <a:pPr>
               <a:spcAft>
                 <a:spcPts val="300"/>
@@ -10124,7 +10028,8 @@
               </a:defRPr>
             </a:pPr>
             <a:r>
-              <a:t>Common official Cargo/std were experimental controls, not deployment requirements.</a:t>
+              <a:rPr sz="1700"/>
+              <a:t>Native correctness passed for both arms; fresh targets and alternating order.</a:t>
             </a:r>
           </a:p>
           <a:p>
@@ -10140,7 +10045,8 @@
               </a:defRPr>
             </a:pPr>
             <a:r>
-              <a:t>Native build/linker differences remain; no added ThinLTO in this comparison.</a:t>
+              <a:rPr sz="1700"/>
+              <a:t>Common Cargo; own stdlib with verified identical runtime bytes; no compiler cache.</a:t>
             </a:r>
           </a:p>
           <a:p>
@@ -10156,7 +10062,25 @@
               </a:defRPr>
             </a:pPr>
             <a:r>
-              <a:t>Observed production-pair ranges are not confidence intervals.</a:t>
+              <a:rPr sz="1700"/>
+              <a:t>Compiler/sysroot pilot only: no full-release or doctest qualification.</a:t>
+            </a:r>
+          </a:p>
+          <a:p>
+            <a:pPr>
+              <a:spcAft>
+                <a:spcPts val="300"/>
+              </a:spcAft>
+              <a:defRPr sz="1800" b="0">
+                <a:solidFill>
+                  <a:srgbClr val="14324F"/>
+                </a:solidFill>
+                <a:latin typeface="Calibri"/>
+              </a:defRPr>
+            </a:pPr>
+            <a:r>
+              <a:rPr sz="1700"/>
+              <a:t>Earlier 7.6%: both ThinLTO modes added; LLD retained in both arms.</a:t>
             </a:r>
           </a:p>
         </p:txBody>
@@ -10196,8 +10120,20 @@
                 <a:latin typeface="Calibri"/>
               </a:defRPr>
             </a:pPr>
-            <a:r>
-              <a:t>X64-PGO-FRESH-REPLAY.md / X64-PGO-COMPARISON.md; accepted full distributions qualified.</a:t>
+            <a:pPr>
+              <a:spcAft>
+                <a:spcPts val="300"/>
+              </a:spcAft>
+              <a:defRPr sz="1000" b="0">
+                <a:solidFill>
+                  <a:srgbClr val="506072"/>
+                </a:solidFill>
+                <a:latin typeface="Calibri"/>
+              </a:defRPr>
+            </a:pPr>
+            <a:r>
+              <a:rPr sz="1000"/>
+              <a:t>Completed consumer 41076640207; detailed results and raw evidence: X64-RUST-THIN-INCREMENTAL.md</a:t>
             </a:r>
           </a:p>
         </p:txBody>
@@ -10248,7 +10184,7 @@
             </a:pPr>
             <a:r>
               <a:rPr sz="1000"/>
-              <a:t>4 / 14</a:t>
+              <a:t>3 / 14</a:t>
             </a:r>
           </a:p>
         </p:txBody>
@@ -10262,6 +10198,651 @@
 </file>
 
 <file path=ppt/slides/slide4.xml><?xml version="1.0" encoding="utf-8"?>
+<p:sld xmlns:a="http://schemas.openxmlformats.org/drawingml/2006/main" xmlns:p="http://schemas.openxmlformats.org/presentationml/2006/main" xmlns:r="http://schemas.openxmlformats.org/officeDocument/2006/relationships">
+  <p:cSld>
+    <p:bg>
+      <p:bgPr>
+        <a:solidFill>
+          <a:srgbClr val="FFFFFF"/>
+        </a:solidFill>
+        <a:effectLst/>
+      </p:bgPr>
+    </p:bg>
+    <p:spTree>
+      <p:nvGrpSpPr>
+        <p:cNvPr id="1" name=""/>
+        <p:cNvGrpSpPr/>
+        <p:nvPr/>
+      </p:nvGrpSpPr>
+      <p:grpSpPr/>
+      <p:sp>
+        <p:nvSpPr>
+          <p:cNvPr id="2" name="TextBox 1"/>
+          <p:cNvSpPr txBox="1"/>
+          <p:nvPr/>
+        </p:nvSpPr>
+        <p:spPr>
+          <a:xfrm>
+            <a:off x="609600" y="381000"/>
+            <a:ext cx="10972800" cy="609600"/>
+          </a:xfrm>
+          <a:prstGeom prst="rect">
+            <a:avLst/>
+          </a:prstGeom>
+          <a:noFill/>
+        </p:spPr>
+        <p:txBody>
+          <a:bodyPr wrap="square" lIns="0" rIns="0" tIns="0" bIns="0">
+            <a:spAutoFit/>
+          </a:bodyPr>
+          <a:lstStyle/>
+          <a:p>
+            <a:pPr>
+              <a:spcAft>
+                <a:spcPts val="300"/>
+              </a:spcAft>
+              <a:defRPr sz="2800" b="1">
+                <a:solidFill>
+                  <a:srgbClr val="14324F"/>
+                </a:solidFill>
+                <a:latin typeface="Calibri"/>
+              </a:defRPr>
+            </a:pPr>
+            <a:r>
+              <a:t>Later x64 studies: benefit and production cost differ</a:t>
+            </a:r>
+          </a:p>
+        </p:txBody>
+      </p:sp>
+      <p:sp>
+        <p:nvSpPr>
+          <p:cNvPr id="3" name="TextBox 2"/>
+          <p:cNvSpPr txBox="1"/>
+          <p:nvPr/>
+        </p:nvSpPr>
+        <p:spPr>
+          <a:xfrm>
+            <a:off x="609600" y="1079500"/>
+            <a:ext cx="10972800" cy="482600"/>
+          </a:xfrm>
+          <a:prstGeom prst="rect">
+            <a:avLst/>
+          </a:prstGeom>
+          <a:noFill/>
+        </p:spPr>
+        <p:txBody>
+          <a:bodyPr wrap="square" lIns="0" rIns="0" tIns="0" bIns="0">
+            <a:spAutoFit/>
+          </a:bodyPr>
+          <a:lstStyle/>
+          <a:p>
+            <a:pPr>
+              <a:spcAft>
+                <a:spcPts val="300"/>
+              </a:spcAft>
+              <a:defRPr sz="1500" b="0">
+                <a:solidFill>
+                  <a:srgbClr val="506072"/>
+                </a:solidFill>
+                <a:latin typeface="Calibri"/>
+              </a:defRPr>
+            </a:pPr>
+            <a:r>
+              <a:t>Keep each control and workload explicit; do not combine percentages across experiments.</a:t>
+            </a:r>
+          </a:p>
+        </p:txBody>
+      </p:sp>
+      <p:graphicFrame>
+        <p:nvGraphicFramePr>
+          <p:cNvPr id="4" name="Table 3"/>
+          <p:cNvGraphicFramePr>
+            <a:graphicFrameLocks noGrp="1"/>
+          </p:cNvGraphicFramePr>
+          <p:nvPr/>
+        </p:nvGraphicFramePr>
+        <p:xfrm>
+          <a:off x="609600" y="1752600"/>
+          <a:ext cx="10972800" cy="2336800"/>
+        </p:xfrm>
+        <a:graphic>
+          <a:graphicData uri="http://schemas.openxmlformats.org/drawingml/2006/table">
+            <a:tbl>
+              <a:tblPr firstRow="1" bandRow="1">
+                <a:tableStyleId>{5C22544A-7EE6-4342-B048-85BDC9FD1C3A}</a:tableStyleId>
+              </a:tblPr>
+              <a:tblGrid>
+                <a:gridCol w="4318000"/>
+                <a:gridCol w="3352800"/>
+                <a:gridCol w="3302000"/>
+              </a:tblGrid>
+              <a:tr h="584200">
+                <a:tc>
+                  <a:txBody>
+                    <a:bodyPr/>
+                    <a:lstStyle/>
+                    <a:p>
+                      <a:pPr>
+                        <a:defRPr sz="1700" b="1">
+                          <a:solidFill>
+                            <a:srgbClr val="FFFFFF"/>
+                          </a:solidFill>
+                          <a:latin typeface="Calibri"/>
+                        </a:defRPr>
+                      </a:pPr>
+                      <a:r>
+                        <a:t>Comparison</a:t>
+                      </a:r>
+                    </a:p>
+                  </a:txBody>
+                  <a:tcPr marL="101600" marR="76200" marT="50800" marB="50800" anchor="ctr">
+                    <a:solidFill>
+                      <a:srgbClr val="14324F"/>
+                    </a:solidFill>
+                  </a:tcPr>
+                </a:tc>
+                <a:tc>
+                  <a:txBody>
+                    <a:bodyPr/>
+                    <a:lstStyle/>
+                    <a:p>
+                      <a:pPr>
+                        <a:defRPr sz="1700" b="1">
+                          <a:solidFill>
+                            <a:srgbClr val="FFFFFF"/>
+                          </a:solidFill>
+                          <a:latin typeface="Calibri"/>
+                        </a:defRPr>
+                      </a:pPr>
+                      <a:r>
+                        <a:t>Measured endpoint</a:t>
+                      </a:r>
+                    </a:p>
+                  </a:txBody>
+                  <a:tcPr marL="101600" marR="76200" marT="50800" marB="50800" anchor="ctr">
+                    <a:solidFill>
+                      <a:srgbClr val="14324F"/>
+                    </a:solidFill>
+                  </a:tcPr>
+                </a:tc>
+                <a:tc>
+                  <a:txBody>
+                    <a:bodyPr/>
+                    <a:lstStyle/>
+                    <a:p>
+                      <a:pPr>
+                        <a:defRPr sz="1700" b="1">
+                          <a:solidFill>
+                            <a:srgbClr val="FFFFFF"/>
+                          </a:solidFill>
+                          <a:latin typeface="Calibri"/>
+                        </a:defRPr>
+                      </a:pPr>
+                      <a:r>
+                        <a:t>Result</a:t>
+                      </a:r>
+                    </a:p>
+                  </a:txBody>
+                  <a:tcPr marL="101600" marR="76200" marT="50800" marB="50800" anchor="ctr">
+                    <a:solidFill>
+                      <a:srgbClr val="14324F"/>
+                    </a:solidFill>
+                  </a:tcPr>
+                </a:tc>
+              </a:tr>
+              <a:tr h="584200">
+                <a:tc>
+                  <a:txBody>
+                    <a:bodyPr/>
+                    <a:lstStyle/>
+                    <a:p>
+                      <a:pPr>
+                        <a:defRPr sz="1800" b="0">
+                          <a:solidFill>
+                            <a:srgbClr val="14324F"/>
+                          </a:solidFill>
+                          <a:latin typeface="Calibri"/>
+                        </a:defRPr>
+                      </a:pPr>
+                      <a:r>
+                        <a:t>Fresh artifact vs shipping Rust</a:t>
+                      </a:r>
+                    </a:p>
+                  </a:txBody>
+                  <a:tcPr marL="101600" marR="76200" marT="50800" marB="50800" anchor="ctr">
+                    <a:solidFill>
+                      <a:srgbClr val="EFF4F7"/>
+                    </a:solidFill>
+                  </a:tcPr>
+                </a:tc>
+                <a:tc>
+                  <a:txBody>
+                    <a:bodyPr/>
+                    <a:lstStyle/>
+                    <a:p>
+                      <a:pPr>
+                        <a:defRPr sz="1800" b="0">
+                          <a:solidFill>
+                            <a:srgbClr val="14324F"/>
+                          </a:solidFill>
+                          <a:latin typeface="Calibri"/>
+                        </a:defRPr>
+                      </a:pPr>
+                      <a:r>
+                        <a:t>IronRDP offline wall</a:t>
+                      </a:r>
+                    </a:p>
+                  </a:txBody>
+                  <a:tcPr marL="101600" marR="76200" marT="50800" marB="50800" anchor="ctr">
+                    <a:solidFill>
+                      <a:srgbClr val="EFF4F7"/>
+                    </a:solidFill>
+                  </a:tcPr>
+                </a:tc>
+                <a:tc>
+                  <a:txBody>
+                    <a:bodyPr/>
+                    <a:lstStyle/>
+                    <a:p>
+                      <a:pPr>
+                        <a:defRPr sz="1800" b="0">
+                          <a:solidFill>
+                            <a:srgbClr val="14324F"/>
+                          </a:solidFill>
+                          <a:latin typeface="Calibri"/>
+                        </a:defRPr>
+                      </a:pPr>
+                      <a:r>
+                        <a:t>18.0% less (15.0-20.8%)</a:t>
+                      </a:r>
+                    </a:p>
+                  </a:txBody>
+                  <a:tcPr marL="101600" marR="76200" marT="50800" marB="50800" anchor="ctr">
+                    <a:solidFill>
+                      <a:srgbClr val="EFF4F7"/>
+                    </a:solidFill>
+                  </a:tcPr>
+                </a:tc>
+              </a:tr>
+              <a:tr h="584200">
+                <a:tc>
+                  <a:txBody>
+                    <a:bodyPr/>
+                    <a:lstStyle/>
+                    <a:p>
+                      <a:pPr>
+                        <a:defRPr sz="1800" b="0">
+                          <a:solidFill>
+                            <a:srgbClr val="14324F"/>
+                          </a:solidFill>
+                          <a:latin typeface="Calibri"/>
+                        </a:defRPr>
+                      </a:pPr>
+                      <a:r>
+                        <a:t>Same artifact vs upstream rebuild</a:t>
+                      </a:r>
+                    </a:p>
+                  </a:txBody>
+                  <a:tcPr marL="101600" marR="76200" marT="50800" marB="50800" anchor="ctr">
+                    <a:solidFill>
+                      <a:srgbClr val="FFFFFF"/>
+                    </a:solidFill>
+                  </a:tcPr>
+                </a:tc>
+                <a:tc>
+                  <a:txBody>
+                    <a:bodyPr/>
+                    <a:lstStyle/>
+                    <a:p>
+                      <a:pPr>
+                        <a:defRPr sz="1800" b="0">
+                          <a:solidFill>
+                            <a:srgbClr val="14324F"/>
+                          </a:solidFill>
+                          <a:latin typeface="Calibri"/>
+                        </a:defRPr>
+                      </a:pPr>
+                      <a:r>
+                        <a:t>IronRDP offline wall</a:t>
+                      </a:r>
+                    </a:p>
+                  </a:txBody>
+                  <a:tcPr marL="101600" marR="76200" marT="50800" marB="50800" anchor="ctr">
+                    <a:solidFill>
+                      <a:srgbClr val="FFFFFF"/>
+                    </a:solidFill>
+                  </a:tcPr>
+                </a:tc>
+                <a:tc>
+                  <a:txBody>
+                    <a:bodyPr/>
+                    <a:lstStyle/>
+                    <a:p>
+                      <a:pPr>
+                        <a:defRPr sz="1800" b="0">
+                          <a:solidFill>
+                            <a:srgbClr val="14324F"/>
+                          </a:solidFill>
+                          <a:latin typeface="Calibri"/>
+                        </a:defRPr>
+                      </a:pPr>
+                      <a:r>
+                        <a:t>20.9% less (18.1-23.4%)</a:t>
+                      </a:r>
+                    </a:p>
+                  </a:txBody>
+                  <a:tcPr marL="101600" marR="76200" marT="50800" marB="50800" anchor="ctr">
+                    <a:solidFill>
+                      <a:srgbClr val="FFFFFF"/>
+                    </a:solidFill>
+                  </a:tcPr>
+                </a:tc>
+              </a:tr>
+              <a:tr h="584200">
+                <a:tc>
+                  <a:txBody>
+                    <a:bodyPr/>
+                    <a:lstStyle/>
+                    <a:p>
+                      <a:pPr>
+                        <a:defRPr sz="1800" b="0">
+                          <a:solidFill>
+                            <a:srgbClr val="14324F"/>
+                          </a:solidFill>
+                          <a:latin typeface="Calibri"/>
+                        </a:defRPr>
+                      </a:pPr>
+                      <a:r>
+                        <a:t>Two opposite-order release pairs</a:t>
+                      </a:r>
+                    </a:p>
+                  </a:txBody>
+                  <a:tcPr marL="101600" marR="76200" marT="50800" marB="50800" anchor="ctr">
+                    <a:solidFill>
+                      <a:srgbClr val="EFF4F7"/>
+                    </a:solidFill>
+                  </a:tcPr>
+                </a:tc>
+                <a:tc>
+                  <a:txBody>
+                    <a:bodyPr/>
+                    <a:lstStyle/>
+                    <a:p>
+                      <a:pPr>
+                        <a:defRPr sz="1800" b="0">
+                          <a:solidFill>
+                            <a:srgbClr val="14324F"/>
+                          </a:solidFill>
+                          <a:latin typeface="Calibri"/>
+                        </a:defRPr>
+                      </a:pPr>
+                      <a:r>
+                        <a:t>Rust production / whole job</a:t>
+                      </a:r>
+                    </a:p>
+                  </a:txBody>
+                  <a:tcPr marL="101600" marR="76200" marT="50800" marB="50800" anchor="ctr">
+                    <a:solidFill>
+                      <a:srgbClr val="EFF4F7"/>
+                    </a:solidFill>
+                  </a:tcPr>
+                </a:tc>
+                <a:tc>
+                  <a:txBody>
+                    <a:bodyPr/>
+                    <a:lstStyle/>
+                    <a:p>
+                      <a:pPr>
+                        <a:defRPr sz="1800" b="0">
+                          <a:solidFill>
+                            <a:srgbClr val="14324F"/>
+                          </a:solidFill>
+                          <a:latin typeface="Calibri"/>
+                        </a:defRPr>
+                      </a:pPr>
+                      <a:r>
+                        <a:t>2.71% / 4.00% more</a:t>
+                      </a:r>
+                    </a:p>
+                  </a:txBody>
+                  <a:tcPr marL="101600" marR="76200" marT="50800" marB="50800" anchor="ctr">
+                    <a:solidFill>
+                      <a:srgbClr val="EFF4F7"/>
+                    </a:solidFill>
+                  </a:tcPr>
+                </a:tc>
+              </a:tr>
+            </a:tbl>
+          </a:graphicData>
+        </a:graphic>
+      </p:graphicFrame>
+      <p:sp>
+        <p:nvSpPr>
+          <p:cNvPr id="5" name="TextBox 4"/>
+          <p:cNvSpPr txBox="1"/>
+          <p:nvPr/>
+        </p:nvSpPr>
+        <p:spPr>
+          <a:xfrm>
+            <a:off x="609600" y="4508500"/>
+            <a:ext cx="10972800" cy="457200"/>
+          </a:xfrm>
+          <a:prstGeom prst="rect">
+            <a:avLst/>
+          </a:prstGeom>
+          <a:noFill/>
+        </p:spPr>
+        <p:txBody>
+          <a:bodyPr wrap="square" lIns="0" rIns="0" tIns="0" bIns="0">
+            <a:spAutoFit/>
+          </a:bodyPr>
+          <a:lstStyle/>
+          <a:p>
+            <a:pPr>
+              <a:spcAft>
+                <a:spcPts val="300"/>
+              </a:spcAft>
+              <a:defRPr sz="2100" b="1">
+                <a:solidFill>
+                  <a:srgbClr val="007F8B"/>
+                </a:solidFill>
+                <a:latin typeface="Calibri"/>
+              </a:defRPr>
+            </a:pPr>
+            <a:r>
+              <a:t>These are not the isolated 13.73% / 12.93% LLVM-profile estimates.</a:t>
+            </a:r>
+          </a:p>
+        </p:txBody>
+      </p:sp>
+      <p:sp>
+        <p:nvSpPr>
+          <p:cNvPr id="6" name="TextBox 5"/>
+          <p:cNvSpPr txBox="1"/>
+          <p:nvPr/>
+        </p:nvSpPr>
+        <p:spPr>
+          <a:xfrm>
+            <a:off x="609600" y="5105400"/>
+            <a:ext cx="10972800" cy="1193800"/>
+          </a:xfrm>
+          <a:prstGeom prst="rect">
+            <a:avLst/>
+          </a:prstGeom>
+          <a:noFill/>
+        </p:spPr>
+        <p:txBody>
+          <a:bodyPr wrap="square" lIns="0" rIns="0" tIns="0" bIns="0">
+            <a:spAutoFit/>
+          </a:bodyPr>
+          <a:lstStyle/>
+          <a:p>
+            <a:pPr>
+              <a:spcAft>
+                <a:spcPts val="300"/>
+              </a:spcAft>
+              <a:defRPr sz="1800" b="0">
+                <a:solidFill>
+                  <a:srgbClr val="14324F"/>
+                </a:solidFill>
+                <a:latin typeface="Calibri"/>
+              </a:defRPr>
+            </a:pPr>
+            <a:r>
+              <a:t>Five independent standard Windows VMs; intervals resample paired VMs.</a:t>
+            </a:r>
+          </a:p>
+          <a:p>
+            <a:pPr>
+              <a:spcAft>
+                <a:spcPts val="300"/>
+              </a:spcAft>
+              <a:defRPr sz="1800" b="0">
+                <a:solidFill>
+                  <a:srgbClr val="14324F"/>
+                </a:solidFill>
+                <a:latin typeface="Calibri"/>
+              </a:defRPr>
+            </a:pPr>
+            <a:r>
+              <a:t>Common official Cargo/std were experimental controls, not deployment requirements.</a:t>
+            </a:r>
+          </a:p>
+          <a:p>
+            <a:pPr>
+              <a:spcAft>
+                <a:spcPts val="300"/>
+              </a:spcAft>
+              <a:defRPr sz="1800" b="0">
+                <a:solidFill>
+                  <a:srgbClr val="14324F"/>
+                </a:solidFill>
+                <a:latin typeface="Calibri"/>
+              </a:defRPr>
+            </a:pPr>
+            <a:r>
+              <a:t>Native build/linker differences remain; no added ThinLTO in this comparison.</a:t>
+            </a:r>
+          </a:p>
+          <a:p>
+            <a:pPr>
+              <a:spcAft>
+                <a:spcPts val="300"/>
+              </a:spcAft>
+              <a:defRPr sz="1800" b="0">
+                <a:solidFill>
+                  <a:srgbClr val="14324F"/>
+                </a:solidFill>
+                <a:latin typeface="Calibri"/>
+              </a:defRPr>
+            </a:pPr>
+            <a:r>
+              <a:t>Observed production-pair ranges are not confidence intervals.</a:t>
+            </a:r>
+          </a:p>
+        </p:txBody>
+      </p:sp>
+      <p:sp>
+        <p:nvSpPr>
+          <p:cNvPr id="7" name="TextBox 6">
+            <a:hlinkClick r:id="rId2"/>
+          </p:cNvPr>
+          <p:cNvSpPr txBox="1"/>
+          <p:nvPr/>
+        </p:nvSpPr>
+        <p:spPr>
+          <a:xfrm>
+            <a:off x="609600" y="6477000"/>
+            <a:ext cx="10287000" cy="215900"/>
+          </a:xfrm>
+          <a:prstGeom prst="rect">
+            <a:avLst/>
+          </a:prstGeom>
+          <a:noFill/>
+        </p:spPr>
+        <p:txBody>
+          <a:bodyPr wrap="square" lIns="0" rIns="0" tIns="0" bIns="0">
+            <a:spAutoFit/>
+          </a:bodyPr>
+          <a:lstStyle/>
+          <a:p>
+            <a:pPr>
+              <a:spcAft>
+                <a:spcPts val="300"/>
+              </a:spcAft>
+              <a:defRPr sz="1000" b="0">
+                <a:solidFill>
+                  <a:srgbClr val="506072"/>
+                </a:solidFill>
+                <a:latin typeface="Calibri"/>
+              </a:defRPr>
+            </a:pPr>
+            <a:r>
+              <a:t>X64-PGO-FRESH-REPLAY.md / X64-PGO-COMPARISON.md; accepted full distributions qualified.</a:t>
+            </a:r>
+          </a:p>
+        </p:txBody>
+      </p:sp>
+      <p:sp>
+        <p:nvSpPr>
+          <p:cNvPr id="8" name="TextBox 7"/>
+          <p:cNvSpPr txBox="1"/>
+          <p:nvPr/>
+        </p:nvSpPr>
+        <p:spPr>
+          <a:xfrm>
+            <a:off x="11150600" y="6477000"/>
+            <a:ext cx="698500" cy="228600"/>
+          </a:xfrm>
+          <a:prstGeom prst="rect">
+            <a:avLst/>
+          </a:prstGeom>
+          <a:noFill/>
+        </p:spPr>
+        <p:txBody>
+          <a:bodyPr wrap="square" lIns="0" rIns="0" tIns="0" bIns="0">
+            <a:spAutoFit/>
+          </a:bodyPr>
+          <a:lstStyle/>
+          <a:p>
+            <a:pPr>
+              <a:spcAft>
+                <a:spcPts val="300"/>
+              </a:spcAft>
+              <a:defRPr sz="1000" b="0">
+                <a:solidFill>
+                  <a:srgbClr val="506072"/>
+                </a:solidFill>
+                <a:latin typeface="Calibri"/>
+              </a:defRPr>
+            </a:pPr>
+            <a:pPr>
+              <a:spcAft>
+                <a:spcPts val="300"/>
+              </a:spcAft>
+              <a:defRPr sz="1000" b="0">
+                <a:solidFill>
+                  <a:srgbClr val="506072"/>
+                </a:solidFill>
+                <a:latin typeface="Calibri"/>
+              </a:defRPr>
+            </a:pPr>
+            <a:r>
+              <a:rPr sz="1000"/>
+              <a:t>4 / 14</a:t>
+            </a:r>
+          </a:p>
+        </p:txBody>
+      </p:sp>
+    </p:spTree>
+  </p:cSld>
+  <p:clrMapOvr>
+    <a:masterClrMapping/>
+  </p:clrMapOvr>
+</p:sld>
+</file>
+
+<file path=ppt/slides/slide5.xml><?xml version="1.0" encoding="utf-8"?>
 <p:sld xmlns:a="http://schemas.openxmlformats.org/drawingml/2006/main" xmlns:r="http://schemas.openxmlformats.org/officeDocument/2006/relationships" xmlns:p="http://schemas.openxmlformats.org/presentationml/2006/main">
   <p:cSld>
     <p:bg>
@@ -11332,7 +11913,7 @@
 </p:sld>
 </file>
 
-<file path=ppt/slides/slide5.xml><?xml version="1.0" encoding="utf-8"?>
+<file path=ppt/slides/slide6.xml><?xml version="1.0" encoding="utf-8"?>
 <p:sld xmlns:a="http://schemas.openxmlformats.org/drawingml/2006/main" xmlns:r="http://schemas.openxmlformats.org/officeDocument/2006/relationships" xmlns:p="http://schemas.openxmlformats.org/presentationml/2006/main">
   <p:cSld>
     <p:bg>
@@ -12214,7 +12795,7 @@
 </p:sld>
 </file>
 
-<file path=ppt/slides/slide6.xml><?xml version="1.0" encoding="utf-8"?>
+<file path=ppt/slides/slide7.xml><?xml version="1.0" encoding="utf-8"?>
 <p:sld xmlns:a="http://schemas.openxmlformats.org/drawingml/2006/main" xmlns:p="http://schemas.openxmlformats.org/presentationml/2006/main" xmlns:r="http://schemas.openxmlformats.org/officeDocument/2006/relationships">
   <p:cSld>
     <p:bg>
@@ -12852,651 +13433,6 @@
             <a:r>
               <a:rPr sz="1000"/>
               <a:t>7 / 14</a:t>
-            </a:r>
-          </a:p>
-        </p:txBody>
-      </p:sp>
-    </p:spTree>
-  </p:cSld>
-  <p:clrMapOvr>
-    <a:masterClrMapping/>
-  </p:clrMapOvr>
-</p:sld>
-</file>
-
-<file path=ppt/slides/slide7.xml><?xml version="1.0" encoding="utf-8"?>
-<p:sld xmlns:a="http://schemas.openxmlformats.org/drawingml/2006/main" xmlns:p="http://schemas.openxmlformats.org/presentationml/2006/main" xmlns:r="http://schemas.openxmlformats.org/officeDocument/2006/relationships">
-  <p:cSld>
-    <p:bg>
-      <p:bgPr>
-        <a:solidFill>
-          <a:srgbClr val="FFFFFF"/>
-        </a:solidFill>
-        <a:effectLst/>
-      </p:bgPr>
-    </p:bg>
-    <p:spTree>
-      <p:nvGrpSpPr>
-        <p:cNvPr id="1" name=""/>
-        <p:cNvGrpSpPr/>
-        <p:nvPr/>
-      </p:nvGrpSpPr>
-      <p:grpSpPr/>
-      <p:sp>
-        <p:nvSpPr>
-          <p:cNvPr id="2" name="TextBox 1"/>
-          <p:cNvSpPr txBox="1"/>
-          <p:nvPr/>
-        </p:nvSpPr>
-        <p:spPr>
-          <a:xfrm>
-            <a:off x="609600" y="381000"/>
-            <a:ext cx="10972800" cy="609600"/>
-          </a:xfrm>
-          <a:prstGeom prst="rect">
-            <a:avLst/>
-          </a:prstGeom>
-          <a:noFill/>
-        </p:spPr>
-        <p:txBody>
-          <a:bodyPr wrap="square" lIns="0" rIns="0" tIns="0" bIns="0">
-            <a:spAutoFit/>
-          </a:bodyPr>
-          <a:lstStyle/>
-          <a:p>
-            <a:pPr>
-              <a:spcAft>
-                <a:spcPts val="300"/>
-              </a:spcAft>
-              <a:defRPr sz="2800" b="1">
-                <a:solidFill>
-                  <a:srgbClr val="14324F"/>
-                </a:solidFill>
-                <a:latin typeface="Calibri"/>
-              </a:defRPr>
-            </a:pPr>
-            <a:r>
-              <a:t>Actual upstream artifact: the expected gain is absent</a:t>
-            </a:r>
-          </a:p>
-        </p:txBody>
-      </p:sp>
-      <p:sp>
-        <p:nvSpPr>
-          <p:cNvPr id="3" name="TextBox 2"/>
-          <p:cNvSpPr txBox="1"/>
-          <p:nvPr/>
-        </p:nvSpPr>
-        <p:spPr>
-          <a:xfrm>
-            <a:off x="609600" y="1079500"/>
-            <a:ext cx="10972800" cy="482600"/>
-          </a:xfrm>
-          <a:prstGeom prst="rect">
-            <a:avLst/>
-          </a:prstGeom>
-          <a:noFill/>
-        </p:spPr>
-        <p:txBody>
-          <a:bodyPr wrap="square" lIns="0" rIns="0" tIns="0" bIns="0">
-            <a:spAutoFit/>
-          </a:bodyPr>
-          <a:lstStyle/>
-          <a:p>
-            <a:pPr>
-              <a:spcAft>
-                <a:spcPts val="300"/>
-              </a:spcAft>
-              <a:defRPr sz="1500" b="0">
-                <a:solidFill>
-                  <a:srgbClr val="506072"/>
-                </a:solidFill>
-                <a:latin typeface="Calibri"/>
-              </a:defRPr>
-            </a:pPr>
-            <a:r>
-              <a:t>IronRDP compilation with Rust 1.101.0-nightly try 51dae839 versus exact parent dc44e7f.</a:t>
-            </a:r>
-          </a:p>
-        </p:txBody>
-      </p:sp>
-      <p:graphicFrame>
-        <p:nvGraphicFramePr>
-          <p:cNvPr id="4" name="Table 3"/>
-          <p:cNvGraphicFramePr>
-            <a:graphicFrameLocks noGrp="1"/>
-          </p:cNvGraphicFramePr>
-          <p:nvPr/>
-        </p:nvGraphicFramePr>
-        <p:xfrm>
-          <a:off x="609600" y="1752600"/>
-          <a:ext cx="10972800" cy="2235200"/>
-        </p:xfrm>
-        <a:graphic>
-          <a:graphicData uri="http://schemas.openxmlformats.org/drawingml/2006/table">
-            <a:tbl>
-              <a:tblPr firstRow="1" bandRow="1">
-                <a:tableStyleId>{5C22544A-7EE6-4342-B048-85BDC9FD1C3A}</a:tableStyleId>
-              </a:tblPr>
-              <a:tblGrid>
-                <a:gridCol w="4318000"/>
-                <a:gridCol w="3327400"/>
-                <a:gridCol w="3327400"/>
-              </a:tblGrid>
-              <a:tr h="558800">
-                <a:tc>
-                  <a:txBody>
-                    <a:bodyPr/>
-                    <a:lstStyle/>
-                    <a:p>
-                      <a:pPr>
-                        <a:defRPr sz="1900" b="1">
-                          <a:solidFill>
-                            <a:srgbClr val="FFFFFF"/>
-                          </a:solidFill>
-                          <a:latin typeface="Calibri"/>
-                        </a:defRPr>
-                      </a:pPr>
-                      <a:r>
-                        <a:t>Already-built toolchain</a:t>
-                      </a:r>
-                    </a:p>
-                  </a:txBody>
-                  <a:tcPr marL="101600" marR="76200" marT="50800" marB="50800" anchor="ctr">
-                    <a:solidFill>
-                      <a:srgbClr val="14324F"/>
-                    </a:solidFill>
-                  </a:tcPr>
-                </a:tc>
-                <a:tc>
-                  <a:txBody>
-                    <a:bodyPr/>
-                    <a:lstStyle/>
-                    <a:p>
-                      <a:pPr>
-                        <a:defRPr sz="1900" b="1">
-                          <a:solidFill>
-                            <a:srgbClr val="FFFFFF"/>
-                          </a:solidFill>
-                          <a:latin typeface="Calibri"/>
-                        </a:defRPr>
-                      </a:pPr>
-                      <a:r>
-                        <a:t>IronRDP wall seconds</a:t>
-                      </a:r>
-                    </a:p>
-                  </a:txBody>
-                  <a:tcPr marL="101600" marR="76200" marT="50800" marB="50800" anchor="ctr">
-                    <a:solidFill>
-                      <a:srgbClr val="14324F"/>
-                    </a:solidFill>
-                  </a:tcPr>
-                </a:tc>
-                <a:tc>
-                  <a:txBody>
-                    <a:bodyPr/>
-                    <a:lstStyle/>
-                    <a:p>
-                      <a:pPr>
-                        <a:defRPr sz="1900" b="1">
-                          <a:solidFill>
-                            <a:srgbClr val="FFFFFF"/>
-                          </a:solidFill>
-                          <a:latin typeface="Calibri"/>
-                        </a:defRPr>
-                      </a:pPr>
-                      <a:r>
-                        <a:t>Descendant CPU seconds</a:t>
-                      </a:r>
-                    </a:p>
-                  </a:txBody>
-                  <a:tcPr marL="101600" marR="76200" marT="50800" marB="50800" anchor="ctr">
-                    <a:solidFill>
-                      <a:srgbClr val="14324F"/>
-                    </a:solidFill>
-                  </a:tcPr>
-                </a:tc>
-              </a:tr>
-              <a:tr h="558800">
-                <a:tc>
-                  <a:txBody>
-                    <a:bodyPr/>
-                    <a:lstStyle/>
-                    <a:p>
-                      <a:pPr>
-                        <a:defRPr sz="2000" b="0">
-                          <a:solidFill>
-                            <a:srgbClr val="14324F"/>
-                          </a:solidFill>
-                          <a:latin typeface="Calibri"/>
-                        </a:defRPr>
-                      </a:pPr>
-                      <a:r>
-                        <a:t>Exact parent</a:t>
-                      </a:r>
-                    </a:p>
-                  </a:txBody>
-                  <a:tcPr marL="101600" marR="76200" marT="50800" marB="50800" anchor="ctr">
-                    <a:solidFill>
-                      <a:srgbClr val="EFF4F7"/>
-                    </a:solidFill>
-                  </a:tcPr>
-                </a:tc>
-                <a:tc>
-                  <a:txBody>
-                    <a:bodyPr/>
-                    <a:lstStyle/>
-                    <a:p>
-                      <a:pPr>
-                        <a:defRPr sz="2000" b="0">
-                          <a:solidFill>
-                            <a:srgbClr val="14324F"/>
-                          </a:solidFill>
-                          <a:latin typeface="Calibri"/>
-                        </a:defRPr>
-                      </a:pPr>
-                      <a:r>
-                        <a:t>630.066</a:t>
-                      </a:r>
-                    </a:p>
-                  </a:txBody>
-                  <a:tcPr marL="101600" marR="76200" marT="50800" marB="50800" anchor="ctr">
-                    <a:solidFill>
-                      <a:srgbClr val="EFF4F7"/>
-                    </a:solidFill>
-                  </a:tcPr>
-                </a:tc>
-                <a:tc>
-                  <a:txBody>
-                    <a:bodyPr/>
-                    <a:lstStyle/>
-                    <a:p>
-                      <a:pPr>
-                        <a:defRPr sz="2000" b="0">
-                          <a:solidFill>
-                            <a:srgbClr val="14324F"/>
-                          </a:solidFill>
-                          <a:latin typeface="Calibri"/>
-                        </a:defRPr>
-                      </a:pPr>
-                      <a:r>
-                        <a:t>2443.008</a:t>
-                      </a:r>
-                    </a:p>
-                  </a:txBody>
-                  <a:tcPr marL="101600" marR="76200" marT="50800" marB="50800" anchor="ctr">
-                    <a:solidFill>
-                      <a:srgbClr val="EFF4F7"/>
-                    </a:solidFill>
-                  </a:tcPr>
-                </a:tc>
-              </a:tr>
-              <a:tr h="558800">
-                <a:tc>
-                  <a:txBody>
-                    <a:bodyPr/>
-                    <a:lstStyle/>
-                    <a:p>
-                      <a:pPr>
-                        <a:defRPr sz="2000" b="0">
-                          <a:solidFill>
-                            <a:srgbClr val="14324F"/>
-                          </a:solidFill>
-                          <a:latin typeface="Calibri"/>
-                        </a:defRPr>
-                      </a:pPr>
-                      <a:r>
-                        <a:t>Requested upstream artifact</a:t>
-                      </a:r>
-                    </a:p>
-                  </a:txBody>
-                  <a:tcPr marL="101600" marR="76200" marT="50800" marB="50800" anchor="ctr">
-                    <a:solidFill>
-                      <a:srgbClr val="FFFFFF"/>
-                    </a:solidFill>
-                  </a:tcPr>
-                </a:tc>
-                <a:tc>
-                  <a:txBody>
-                    <a:bodyPr/>
-                    <a:lstStyle/>
-                    <a:p>
-                      <a:pPr>
-                        <a:defRPr sz="2000" b="0">
-                          <a:solidFill>
-                            <a:srgbClr val="14324F"/>
-                          </a:solidFill>
-                          <a:latin typeface="Calibri"/>
-                        </a:defRPr>
-                      </a:pPr>
-                      <a:r>
-                        <a:t>628.713</a:t>
-                      </a:r>
-                    </a:p>
-                  </a:txBody>
-                  <a:tcPr marL="101600" marR="76200" marT="50800" marB="50800" anchor="ctr">
-                    <a:solidFill>
-                      <a:srgbClr val="FFFFFF"/>
-                    </a:solidFill>
-                  </a:tcPr>
-                </a:tc>
-                <a:tc>
-                  <a:txBody>
-                    <a:bodyPr/>
-                    <a:lstStyle/>
-                    <a:p>
-                      <a:pPr>
-                        <a:defRPr sz="2000" b="0">
-                          <a:solidFill>
-                            <a:srgbClr val="14324F"/>
-                          </a:solidFill>
-                          <a:latin typeface="Calibri"/>
-                        </a:defRPr>
-                      </a:pPr>
-                      <a:r>
-                        <a:t>2439.039</a:t>
-                      </a:r>
-                    </a:p>
-                  </a:txBody>
-                  <a:tcPr marL="101600" marR="76200" marT="50800" marB="50800" anchor="ctr">
-                    <a:solidFill>
-                      <a:srgbClr val="FFFFFF"/>
-                    </a:solidFill>
-                  </a:tcPr>
-                </a:tc>
-              </a:tr>
-              <a:tr h="558800">
-                <a:tc>
-                  <a:txBody>
-                    <a:bodyPr/>
-                    <a:lstStyle/>
-                    <a:p>
-                      <a:pPr>
-                        <a:defRPr sz="2000" b="0">
-                          <a:solidFill>
-                            <a:srgbClr val="14324F"/>
-                          </a:solidFill>
-                          <a:latin typeface="Calibri"/>
-                        </a:defRPr>
-                      </a:pPr>
-                      <a:r>
-                        <a:t>Reduction</a:t>
-                      </a:r>
-                    </a:p>
-                  </a:txBody>
-                  <a:tcPr marL="101600" marR="76200" marT="50800" marB="50800" anchor="ctr">
-                    <a:solidFill>
-                      <a:srgbClr val="EFF4F7"/>
-                    </a:solidFill>
-                  </a:tcPr>
-                </a:tc>
-                <a:tc>
-                  <a:txBody>
-                    <a:bodyPr/>
-                    <a:lstStyle/>
-                    <a:p>
-                      <a:pPr>
-                        <a:defRPr sz="2000" b="0">
-                          <a:solidFill>
-                            <a:srgbClr val="14324F"/>
-                          </a:solidFill>
-                          <a:latin typeface="Calibri"/>
-                        </a:defRPr>
-                      </a:pPr>
-                      <a:r>
-                        <a:t>0.21%</a:t>
-                      </a:r>
-                    </a:p>
-                  </a:txBody>
-                  <a:tcPr marL="101600" marR="76200" marT="50800" marB="50800" anchor="ctr">
-                    <a:solidFill>
-                      <a:srgbClr val="EFF4F7"/>
-                    </a:solidFill>
-                  </a:tcPr>
-                </a:tc>
-                <a:tc>
-                  <a:txBody>
-                    <a:bodyPr/>
-                    <a:lstStyle/>
-                    <a:p>
-                      <a:pPr>
-                        <a:defRPr sz="2000" b="0">
-                          <a:solidFill>
-                            <a:srgbClr val="14324F"/>
-                          </a:solidFill>
-                          <a:latin typeface="Calibri"/>
-                        </a:defRPr>
-                      </a:pPr>
-                      <a:r>
-                        <a:t>0.16%</a:t>
-                      </a:r>
-                    </a:p>
-                  </a:txBody>
-                  <a:tcPr marL="101600" marR="76200" marT="50800" marB="50800" anchor="ctr">
-                    <a:solidFill>
-                      <a:srgbClr val="EFF4F7"/>
-                    </a:solidFill>
-                  </a:tcPr>
-                </a:tc>
-              </a:tr>
-            </a:tbl>
-          </a:graphicData>
-        </a:graphic>
-      </p:graphicFrame>
-      <p:sp>
-        <p:nvSpPr>
-          <p:cNvPr id="5" name="TextBox 4"/>
-          <p:cNvSpPr txBox="1"/>
-          <p:nvPr/>
-        </p:nvSpPr>
-        <p:spPr>
-          <a:xfrm>
-            <a:off x="609600" y="4356100"/>
-            <a:ext cx="10972800" cy="469900"/>
-          </a:xfrm>
-          <a:prstGeom prst="rect">
-            <a:avLst/>
-          </a:prstGeom>
-          <a:noFill/>
-        </p:spPr>
-        <p:txBody>
-          <a:bodyPr wrap="square" lIns="0" rIns="0" tIns="0" bIns="0">
-            <a:spAutoFit/>
-          </a:bodyPr>
-          <a:lstStyle/>
-          <a:p>
-            <a:pPr>
-              <a:spcAft>
-                <a:spcPts val="300"/>
-              </a:spcAft>
-              <a:defRPr sz="2200" b="1">
-                <a:solidFill>
-                  <a:srgbClr val="007F8B"/>
-                </a:solidFill>
-                <a:latin typeface="Calibri"/>
-              </a:defRPr>
-            </a:pPr>
-            <a:r>
-              <a:t>This did not reproduce the earlier approximately 13% gain.</a:t>
-            </a:r>
-          </a:p>
-        </p:txBody>
-      </p:sp>
-      <p:sp>
-        <p:nvSpPr>
-          <p:cNvPr id="6" name="TextBox 5"/>
-          <p:cNvSpPr txBox="1"/>
-          <p:nvPr/>
-        </p:nvSpPr>
-        <p:spPr>
-          <a:xfrm>
-            <a:off x="609600" y="5003800"/>
-            <a:ext cx="10972800" cy="1333500"/>
-          </a:xfrm>
-          <a:prstGeom prst="rect">
-            <a:avLst/>
-          </a:prstGeom>
-          <a:noFill/>
-        </p:spPr>
-        <p:txBody>
-          <a:bodyPr wrap="square" lIns="0" rIns="0" tIns="0" bIns="0">
-            <a:spAutoFit/>
-          </a:bodyPr>
-          <a:lstStyle/>
-          <a:p>
-            <a:pPr>
-              <a:spcAft>
-                <a:spcPts val="300"/>
-              </a:spcAft>
-              <a:defRPr sz="1800" b="0">
-                <a:solidFill>
-                  <a:srgbClr val="14324F"/>
-                </a:solidFill>
-                <a:latin typeface="Calibri"/>
-              </a:defRPr>
-            </a:pPr>
-            <a:r>
-              <a:t>Two cold five-command blocks per compiler; same four-CPU affinity and Cargo,</a:t>
-            </a:r>
-          </a:p>
-          <a:p>
-            <a:pPr>
-              <a:spcAft>
-                <a:spcPts val="300"/>
-              </a:spcAft>
-              <a:defRPr sz="1800" b="0">
-                <a:solidFill>
-                  <a:srgbClr val="14324F"/>
-                </a:solidFill>
-                <a:latin typeface="Calibri"/>
-              </a:defRPr>
-            </a:pPr>
-            <a:r>
-              <a:t>each compiler's own std. One failed source-read block was verified and resumed.</a:t>
-            </a:r>
-          </a:p>
-          <a:p>
-            <a:pPr>
-              <a:spcAft>
-                <a:spcPts val="300"/>
-              </a:spcAft>
-              <a:defRPr sz="1800" b="0">
-                <a:solidFill>
-                  <a:srgbClr val="14324F"/>
-                </a:solidFill>
-                <a:latin typeface="Calibri"/>
-              </a:defRPr>
-            </a:pPr>
-            <a:r>
-              <a:t>20 successful measured commands; no statistical qualification.</a:t>
-            </a:r>
-          </a:p>
-          <a:p>
-            <a:pPr>
-              <a:spcAft>
-                <a:spcPts val="300"/>
-              </a:spcAft>
-              <a:defRPr sz="1800" b="0">
-                <a:solidFill>
-                  <a:srgbClr val="14324F"/>
-                </a:solidFill>
-                <a:latin typeface="Calibri"/>
-              </a:defRPr>
-            </a:pPr>
-            <a:r>
-              <a:t>Training coverage was restored, but the producer reported 100% native cache hits.</a:t>
-            </a:r>
-          </a:p>
-        </p:txBody>
-      </p:sp>
-      <p:sp>
-        <p:nvSpPr>
-          <p:cNvPr id="7" name="TextBox 6">
-            <a:hlinkClick r:id="rId2"/>
-          </p:cNvPr>
-          <p:cNvSpPr txBox="1"/>
-          <p:nvPr/>
-        </p:nvSpPr>
-        <p:spPr>
-          <a:xfrm>
-            <a:off x="609600" y="6477000"/>
-            <a:ext cx="10287000" cy="215900"/>
-          </a:xfrm>
-          <a:prstGeom prst="rect">
-            <a:avLst/>
-          </a:prstGeom>
-          <a:noFill/>
-        </p:spPr>
-        <p:txBody>
-          <a:bodyPr wrap="square" lIns="0" rIns="0" tIns="0" bIns="0">
-            <a:spAutoFit/>
-          </a:bodyPr>
-          <a:lstStyle/>
-          <a:p>
-            <a:pPr>
-              <a:spcAft>
-                <a:spcPts val="300"/>
-              </a:spcAft>
-              <a:defRPr sz="1000" b="0">
-                <a:solidFill>
-                  <a:srgbClr val="506072"/>
-                </a:solidFill>
-                <a:latin typeface="Calibri"/>
-              </a:defRPr>
-            </a:pPr>
-            <a:r>
-              <a:t>Completed artifact check: 40409913485. Raw records and failure history: later-pgo-evidence.zip.</a:t>
-            </a:r>
-          </a:p>
-        </p:txBody>
-      </p:sp>
-      <p:sp>
-        <p:nvSpPr>
-          <p:cNvPr id="8" name="TextBox 7"/>
-          <p:cNvSpPr txBox="1"/>
-          <p:nvPr/>
-        </p:nvSpPr>
-        <p:spPr>
-          <a:xfrm>
-            <a:off x="11150600" y="6477000"/>
-            <a:ext cx="698500" cy="228600"/>
-          </a:xfrm>
-          <a:prstGeom prst="rect">
-            <a:avLst/>
-          </a:prstGeom>
-          <a:noFill/>
-        </p:spPr>
-        <p:txBody>
-          <a:bodyPr wrap="square" lIns="0" rIns="0" tIns="0" bIns="0">
-            <a:spAutoFit/>
-          </a:bodyPr>
-          <a:lstStyle/>
-          <a:p>
-            <a:pPr>
-              <a:spcAft>
-                <a:spcPts val="300"/>
-              </a:spcAft>
-              <a:defRPr sz="1000" b="0">
-                <a:solidFill>
-                  <a:srgbClr val="506072"/>
-                </a:solidFill>
-                <a:latin typeface="Calibri"/>
-              </a:defRPr>
-            </a:pPr>
-            <a:pPr>
-              <a:spcAft>
-                <a:spcPts val="300"/>
-              </a:spcAft>
-              <a:defRPr sz="1000" b="0">
-                <a:solidFill>
-                  <a:srgbClr val="506072"/>
-                </a:solidFill>
-                <a:latin typeface="Calibri"/>
-              </a:defRPr>
-            </a:pPr>
-            <a:r>
-              <a:rPr sz="1000"/>
-              <a:t>8 / 14</a:t>
             </a:r>
           </a:p>
         </p:txBody>
@@ -13561,6 +13497,651 @@
               </a:defRPr>
             </a:pPr>
             <a:r>
+              <a:t>Actual upstream artifact: the expected gain is absent</a:t>
+            </a:r>
+          </a:p>
+        </p:txBody>
+      </p:sp>
+      <p:sp>
+        <p:nvSpPr>
+          <p:cNvPr id="3" name="TextBox 2"/>
+          <p:cNvSpPr txBox="1"/>
+          <p:nvPr/>
+        </p:nvSpPr>
+        <p:spPr>
+          <a:xfrm>
+            <a:off x="609600" y="1079500"/>
+            <a:ext cx="10972800" cy="482600"/>
+          </a:xfrm>
+          <a:prstGeom prst="rect">
+            <a:avLst/>
+          </a:prstGeom>
+          <a:noFill/>
+        </p:spPr>
+        <p:txBody>
+          <a:bodyPr wrap="square" lIns="0" rIns="0" tIns="0" bIns="0">
+            <a:spAutoFit/>
+          </a:bodyPr>
+          <a:lstStyle/>
+          <a:p>
+            <a:pPr>
+              <a:spcAft>
+                <a:spcPts val="300"/>
+              </a:spcAft>
+              <a:defRPr sz="1500" b="0">
+                <a:solidFill>
+                  <a:srgbClr val="506072"/>
+                </a:solidFill>
+                <a:latin typeface="Calibri"/>
+              </a:defRPr>
+            </a:pPr>
+            <a:r>
+              <a:t>IronRDP compilation with Rust 1.101.0-nightly try 51dae839 versus exact parent dc44e7f.</a:t>
+            </a:r>
+          </a:p>
+        </p:txBody>
+      </p:sp>
+      <p:graphicFrame>
+        <p:nvGraphicFramePr>
+          <p:cNvPr id="4" name="Table 3"/>
+          <p:cNvGraphicFramePr>
+            <a:graphicFrameLocks noGrp="1"/>
+          </p:cNvGraphicFramePr>
+          <p:nvPr/>
+        </p:nvGraphicFramePr>
+        <p:xfrm>
+          <a:off x="609600" y="1752600"/>
+          <a:ext cx="10972800" cy="2235200"/>
+        </p:xfrm>
+        <a:graphic>
+          <a:graphicData uri="http://schemas.openxmlformats.org/drawingml/2006/table">
+            <a:tbl>
+              <a:tblPr firstRow="1" bandRow="1">
+                <a:tableStyleId>{5C22544A-7EE6-4342-B048-85BDC9FD1C3A}</a:tableStyleId>
+              </a:tblPr>
+              <a:tblGrid>
+                <a:gridCol w="4318000"/>
+                <a:gridCol w="3327400"/>
+                <a:gridCol w="3327400"/>
+              </a:tblGrid>
+              <a:tr h="558800">
+                <a:tc>
+                  <a:txBody>
+                    <a:bodyPr/>
+                    <a:lstStyle/>
+                    <a:p>
+                      <a:pPr>
+                        <a:defRPr sz="1900" b="1">
+                          <a:solidFill>
+                            <a:srgbClr val="FFFFFF"/>
+                          </a:solidFill>
+                          <a:latin typeface="Calibri"/>
+                        </a:defRPr>
+                      </a:pPr>
+                      <a:r>
+                        <a:t>Already-built toolchain</a:t>
+                      </a:r>
+                    </a:p>
+                  </a:txBody>
+                  <a:tcPr marL="101600" marR="76200" marT="50800" marB="50800" anchor="ctr">
+                    <a:solidFill>
+                      <a:srgbClr val="14324F"/>
+                    </a:solidFill>
+                  </a:tcPr>
+                </a:tc>
+                <a:tc>
+                  <a:txBody>
+                    <a:bodyPr/>
+                    <a:lstStyle/>
+                    <a:p>
+                      <a:pPr>
+                        <a:defRPr sz="1900" b="1">
+                          <a:solidFill>
+                            <a:srgbClr val="FFFFFF"/>
+                          </a:solidFill>
+                          <a:latin typeface="Calibri"/>
+                        </a:defRPr>
+                      </a:pPr>
+                      <a:r>
+                        <a:t>IronRDP wall seconds</a:t>
+                      </a:r>
+                    </a:p>
+                  </a:txBody>
+                  <a:tcPr marL="101600" marR="76200" marT="50800" marB="50800" anchor="ctr">
+                    <a:solidFill>
+                      <a:srgbClr val="14324F"/>
+                    </a:solidFill>
+                  </a:tcPr>
+                </a:tc>
+                <a:tc>
+                  <a:txBody>
+                    <a:bodyPr/>
+                    <a:lstStyle/>
+                    <a:p>
+                      <a:pPr>
+                        <a:defRPr sz="1900" b="1">
+                          <a:solidFill>
+                            <a:srgbClr val="FFFFFF"/>
+                          </a:solidFill>
+                          <a:latin typeface="Calibri"/>
+                        </a:defRPr>
+                      </a:pPr>
+                      <a:r>
+                        <a:t>Descendant CPU seconds</a:t>
+                      </a:r>
+                    </a:p>
+                  </a:txBody>
+                  <a:tcPr marL="101600" marR="76200" marT="50800" marB="50800" anchor="ctr">
+                    <a:solidFill>
+                      <a:srgbClr val="14324F"/>
+                    </a:solidFill>
+                  </a:tcPr>
+                </a:tc>
+              </a:tr>
+              <a:tr h="558800">
+                <a:tc>
+                  <a:txBody>
+                    <a:bodyPr/>
+                    <a:lstStyle/>
+                    <a:p>
+                      <a:pPr>
+                        <a:defRPr sz="2000" b="0">
+                          <a:solidFill>
+                            <a:srgbClr val="14324F"/>
+                          </a:solidFill>
+                          <a:latin typeface="Calibri"/>
+                        </a:defRPr>
+                      </a:pPr>
+                      <a:r>
+                        <a:t>Exact parent</a:t>
+                      </a:r>
+                    </a:p>
+                  </a:txBody>
+                  <a:tcPr marL="101600" marR="76200" marT="50800" marB="50800" anchor="ctr">
+                    <a:solidFill>
+                      <a:srgbClr val="EFF4F7"/>
+                    </a:solidFill>
+                  </a:tcPr>
+                </a:tc>
+                <a:tc>
+                  <a:txBody>
+                    <a:bodyPr/>
+                    <a:lstStyle/>
+                    <a:p>
+                      <a:pPr>
+                        <a:defRPr sz="2000" b="0">
+                          <a:solidFill>
+                            <a:srgbClr val="14324F"/>
+                          </a:solidFill>
+                          <a:latin typeface="Calibri"/>
+                        </a:defRPr>
+                      </a:pPr>
+                      <a:r>
+                        <a:t>630.066</a:t>
+                      </a:r>
+                    </a:p>
+                  </a:txBody>
+                  <a:tcPr marL="101600" marR="76200" marT="50800" marB="50800" anchor="ctr">
+                    <a:solidFill>
+                      <a:srgbClr val="EFF4F7"/>
+                    </a:solidFill>
+                  </a:tcPr>
+                </a:tc>
+                <a:tc>
+                  <a:txBody>
+                    <a:bodyPr/>
+                    <a:lstStyle/>
+                    <a:p>
+                      <a:pPr>
+                        <a:defRPr sz="2000" b="0">
+                          <a:solidFill>
+                            <a:srgbClr val="14324F"/>
+                          </a:solidFill>
+                          <a:latin typeface="Calibri"/>
+                        </a:defRPr>
+                      </a:pPr>
+                      <a:r>
+                        <a:t>2443.008</a:t>
+                      </a:r>
+                    </a:p>
+                  </a:txBody>
+                  <a:tcPr marL="101600" marR="76200" marT="50800" marB="50800" anchor="ctr">
+                    <a:solidFill>
+                      <a:srgbClr val="EFF4F7"/>
+                    </a:solidFill>
+                  </a:tcPr>
+                </a:tc>
+              </a:tr>
+              <a:tr h="558800">
+                <a:tc>
+                  <a:txBody>
+                    <a:bodyPr/>
+                    <a:lstStyle/>
+                    <a:p>
+                      <a:pPr>
+                        <a:defRPr sz="2000" b="0">
+                          <a:solidFill>
+                            <a:srgbClr val="14324F"/>
+                          </a:solidFill>
+                          <a:latin typeface="Calibri"/>
+                        </a:defRPr>
+                      </a:pPr>
+                      <a:r>
+                        <a:t>Requested upstream artifact</a:t>
+                      </a:r>
+                    </a:p>
+                  </a:txBody>
+                  <a:tcPr marL="101600" marR="76200" marT="50800" marB="50800" anchor="ctr">
+                    <a:solidFill>
+                      <a:srgbClr val="FFFFFF"/>
+                    </a:solidFill>
+                  </a:tcPr>
+                </a:tc>
+                <a:tc>
+                  <a:txBody>
+                    <a:bodyPr/>
+                    <a:lstStyle/>
+                    <a:p>
+                      <a:pPr>
+                        <a:defRPr sz="2000" b="0">
+                          <a:solidFill>
+                            <a:srgbClr val="14324F"/>
+                          </a:solidFill>
+                          <a:latin typeface="Calibri"/>
+                        </a:defRPr>
+                      </a:pPr>
+                      <a:r>
+                        <a:t>628.713</a:t>
+                      </a:r>
+                    </a:p>
+                  </a:txBody>
+                  <a:tcPr marL="101600" marR="76200" marT="50800" marB="50800" anchor="ctr">
+                    <a:solidFill>
+                      <a:srgbClr val="FFFFFF"/>
+                    </a:solidFill>
+                  </a:tcPr>
+                </a:tc>
+                <a:tc>
+                  <a:txBody>
+                    <a:bodyPr/>
+                    <a:lstStyle/>
+                    <a:p>
+                      <a:pPr>
+                        <a:defRPr sz="2000" b="0">
+                          <a:solidFill>
+                            <a:srgbClr val="14324F"/>
+                          </a:solidFill>
+                          <a:latin typeface="Calibri"/>
+                        </a:defRPr>
+                      </a:pPr>
+                      <a:r>
+                        <a:t>2439.039</a:t>
+                      </a:r>
+                    </a:p>
+                  </a:txBody>
+                  <a:tcPr marL="101600" marR="76200" marT="50800" marB="50800" anchor="ctr">
+                    <a:solidFill>
+                      <a:srgbClr val="FFFFFF"/>
+                    </a:solidFill>
+                  </a:tcPr>
+                </a:tc>
+              </a:tr>
+              <a:tr h="558800">
+                <a:tc>
+                  <a:txBody>
+                    <a:bodyPr/>
+                    <a:lstStyle/>
+                    <a:p>
+                      <a:pPr>
+                        <a:defRPr sz="2000" b="0">
+                          <a:solidFill>
+                            <a:srgbClr val="14324F"/>
+                          </a:solidFill>
+                          <a:latin typeface="Calibri"/>
+                        </a:defRPr>
+                      </a:pPr>
+                      <a:r>
+                        <a:t>Reduction</a:t>
+                      </a:r>
+                    </a:p>
+                  </a:txBody>
+                  <a:tcPr marL="101600" marR="76200" marT="50800" marB="50800" anchor="ctr">
+                    <a:solidFill>
+                      <a:srgbClr val="EFF4F7"/>
+                    </a:solidFill>
+                  </a:tcPr>
+                </a:tc>
+                <a:tc>
+                  <a:txBody>
+                    <a:bodyPr/>
+                    <a:lstStyle/>
+                    <a:p>
+                      <a:pPr>
+                        <a:defRPr sz="2000" b="0">
+                          <a:solidFill>
+                            <a:srgbClr val="14324F"/>
+                          </a:solidFill>
+                          <a:latin typeface="Calibri"/>
+                        </a:defRPr>
+                      </a:pPr>
+                      <a:r>
+                        <a:t>0.21%</a:t>
+                      </a:r>
+                    </a:p>
+                  </a:txBody>
+                  <a:tcPr marL="101600" marR="76200" marT="50800" marB="50800" anchor="ctr">
+                    <a:solidFill>
+                      <a:srgbClr val="EFF4F7"/>
+                    </a:solidFill>
+                  </a:tcPr>
+                </a:tc>
+                <a:tc>
+                  <a:txBody>
+                    <a:bodyPr/>
+                    <a:lstStyle/>
+                    <a:p>
+                      <a:pPr>
+                        <a:defRPr sz="2000" b="0">
+                          <a:solidFill>
+                            <a:srgbClr val="14324F"/>
+                          </a:solidFill>
+                          <a:latin typeface="Calibri"/>
+                        </a:defRPr>
+                      </a:pPr>
+                      <a:r>
+                        <a:t>0.16%</a:t>
+                      </a:r>
+                    </a:p>
+                  </a:txBody>
+                  <a:tcPr marL="101600" marR="76200" marT="50800" marB="50800" anchor="ctr">
+                    <a:solidFill>
+                      <a:srgbClr val="EFF4F7"/>
+                    </a:solidFill>
+                  </a:tcPr>
+                </a:tc>
+              </a:tr>
+            </a:tbl>
+          </a:graphicData>
+        </a:graphic>
+      </p:graphicFrame>
+      <p:sp>
+        <p:nvSpPr>
+          <p:cNvPr id="5" name="TextBox 4"/>
+          <p:cNvSpPr txBox="1"/>
+          <p:nvPr/>
+        </p:nvSpPr>
+        <p:spPr>
+          <a:xfrm>
+            <a:off x="609600" y="4356100"/>
+            <a:ext cx="10972800" cy="469900"/>
+          </a:xfrm>
+          <a:prstGeom prst="rect">
+            <a:avLst/>
+          </a:prstGeom>
+          <a:noFill/>
+        </p:spPr>
+        <p:txBody>
+          <a:bodyPr wrap="square" lIns="0" rIns="0" tIns="0" bIns="0">
+            <a:spAutoFit/>
+          </a:bodyPr>
+          <a:lstStyle/>
+          <a:p>
+            <a:pPr>
+              <a:spcAft>
+                <a:spcPts val="300"/>
+              </a:spcAft>
+              <a:defRPr sz="2200" b="1">
+                <a:solidFill>
+                  <a:srgbClr val="007F8B"/>
+                </a:solidFill>
+                <a:latin typeface="Calibri"/>
+              </a:defRPr>
+            </a:pPr>
+            <a:r>
+              <a:t>This did not reproduce the earlier approximately 13% gain.</a:t>
+            </a:r>
+          </a:p>
+        </p:txBody>
+      </p:sp>
+      <p:sp>
+        <p:nvSpPr>
+          <p:cNvPr id="6" name="TextBox 5"/>
+          <p:cNvSpPr txBox="1"/>
+          <p:nvPr/>
+        </p:nvSpPr>
+        <p:spPr>
+          <a:xfrm>
+            <a:off x="609600" y="5003800"/>
+            <a:ext cx="10972800" cy="1333500"/>
+          </a:xfrm>
+          <a:prstGeom prst="rect">
+            <a:avLst/>
+          </a:prstGeom>
+          <a:noFill/>
+        </p:spPr>
+        <p:txBody>
+          <a:bodyPr wrap="square" lIns="0" rIns="0" tIns="0" bIns="0">
+            <a:spAutoFit/>
+          </a:bodyPr>
+          <a:lstStyle/>
+          <a:p>
+            <a:pPr>
+              <a:spcAft>
+                <a:spcPts val="300"/>
+              </a:spcAft>
+              <a:defRPr sz="1800" b="0">
+                <a:solidFill>
+                  <a:srgbClr val="14324F"/>
+                </a:solidFill>
+                <a:latin typeface="Calibri"/>
+              </a:defRPr>
+            </a:pPr>
+            <a:r>
+              <a:t>Two cold five-command blocks per compiler; same four-CPU affinity and Cargo,</a:t>
+            </a:r>
+          </a:p>
+          <a:p>
+            <a:pPr>
+              <a:spcAft>
+                <a:spcPts val="300"/>
+              </a:spcAft>
+              <a:defRPr sz="1800" b="0">
+                <a:solidFill>
+                  <a:srgbClr val="14324F"/>
+                </a:solidFill>
+                <a:latin typeface="Calibri"/>
+              </a:defRPr>
+            </a:pPr>
+            <a:r>
+              <a:t>each compiler's own std. One failed source-read block was verified and resumed.</a:t>
+            </a:r>
+          </a:p>
+          <a:p>
+            <a:pPr>
+              <a:spcAft>
+                <a:spcPts val="300"/>
+              </a:spcAft>
+              <a:defRPr sz="1800" b="0">
+                <a:solidFill>
+                  <a:srgbClr val="14324F"/>
+                </a:solidFill>
+                <a:latin typeface="Calibri"/>
+              </a:defRPr>
+            </a:pPr>
+            <a:r>
+              <a:t>20 successful measured commands; no statistical qualification.</a:t>
+            </a:r>
+          </a:p>
+          <a:p>
+            <a:pPr>
+              <a:spcAft>
+                <a:spcPts val="300"/>
+              </a:spcAft>
+              <a:defRPr sz="1800" b="0">
+                <a:solidFill>
+                  <a:srgbClr val="14324F"/>
+                </a:solidFill>
+                <a:latin typeface="Calibri"/>
+              </a:defRPr>
+            </a:pPr>
+            <a:r>
+              <a:t>Training coverage was restored, but the producer reported 100% native cache hits.</a:t>
+            </a:r>
+          </a:p>
+        </p:txBody>
+      </p:sp>
+      <p:sp>
+        <p:nvSpPr>
+          <p:cNvPr id="7" name="TextBox 6">
+            <a:hlinkClick r:id="rId2"/>
+          </p:cNvPr>
+          <p:cNvSpPr txBox="1"/>
+          <p:nvPr/>
+        </p:nvSpPr>
+        <p:spPr>
+          <a:xfrm>
+            <a:off x="609600" y="6477000"/>
+            <a:ext cx="10287000" cy="215900"/>
+          </a:xfrm>
+          <a:prstGeom prst="rect">
+            <a:avLst/>
+          </a:prstGeom>
+          <a:noFill/>
+        </p:spPr>
+        <p:txBody>
+          <a:bodyPr wrap="square" lIns="0" rIns="0" tIns="0" bIns="0">
+            <a:spAutoFit/>
+          </a:bodyPr>
+          <a:lstStyle/>
+          <a:p>
+            <a:pPr>
+              <a:spcAft>
+                <a:spcPts val="300"/>
+              </a:spcAft>
+              <a:defRPr sz="1000" b="0">
+                <a:solidFill>
+                  <a:srgbClr val="506072"/>
+                </a:solidFill>
+                <a:latin typeface="Calibri"/>
+              </a:defRPr>
+            </a:pPr>
+            <a:r>
+              <a:t>Completed artifact check: 40409913485. Raw records and failure history: later-pgo-evidence.zip.</a:t>
+            </a:r>
+          </a:p>
+        </p:txBody>
+      </p:sp>
+      <p:sp>
+        <p:nvSpPr>
+          <p:cNvPr id="8" name="TextBox 7"/>
+          <p:cNvSpPr txBox="1"/>
+          <p:nvPr/>
+        </p:nvSpPr>
+        <p:spPr>
+          <a:xfrm>
+            <a:off x="11150600" y="6477000"/>
+            <a:ext cx="698500" cy="228600"/>
+          </a:xfrm>
+          <a:prstGeom prst="rect">
+            <a:avLst/>
+          </a:prstGeom>
+          <a:noFill/>
+        </p:spPr>
+        <p:txBody>
+          <a:bodyPr wrap="square" lIns="0" rIns="0" tIns="0" bIns="0">
+            <a:spAutoFit/>
+          </a:bodyPr>
+          <a:lstStyle/>
+          <a:p>
+            <a:pPr>
+              <a:spcAft>
+                <a:spcPts val="300"/>
+              </a:spcAft>
+              <a:defRPr sz="1000" b="0">
+                <a:solidFill>
+                  <a:srgbClr val="506072"/>
+                </a:solidFill>
+                <a:latin typeface="Calibri"/>
+              </a:defRPr>
+            </a:pPr>
+            <a:pPr>
+              <a:spcAft>
+                <a:spcPts val="300"/>
+              </a:spcAft>
+              <a:defRPr sz="1000" b="0">
+                <a:solidFill>
+                  <a:srgbClr val="506072"/>
+                </a:solidFill>
+                <a:latin typeface="Calibri"/>
+              </a:defRPr>
+            </a:pPr>
+            <a:r>
+              <a:rPr sz="1000"/>
+              <a:t>8 / 14</a:t>
+            </a:r>
+          </a:p>
+        </p:txBody>
+      </p:sp>
+    </p:spTree>
+  </p:cSld>
+  <p:clrMapOvr>
+    <a:masterClrMapping/>
+  </p:clrMapOvr>
+</p:sld>
+</file>
+
+<file path=ppt/slides/slide9.xml><?xml version="1.0" encoding="utf-8"?>
+<p:sld xmlns:a="http://schemas.openxmlformats.org/drawingml/2006/main" xmlns:p="http://schemas.openxmlformats.org/presentationml/2006/main" xmlns:r="http://schemas.openxmlformats.org/officeDocument/2006/relationships">
+  <p:cSld>
+    <p:bg>
+      <p:bgPr>
+        <a:solidFill>
+          <a:srgbClr val="FFFFFF"/>
+        </a:solidFill>
+        <a:effectLst/>
+      </p:bgPr>
+    </p:bg>
+    <p:spTree>
+      <p:nvGrpSpPr>
+        <p:cNvPr id="1" name=""/>
+        <p:cNvGrpSpPr/>
+        <p:nvPr/>
+      </p:nvGrpSpPr>
+      <p:grpSpPr/>
+      <p:sp>
+        <p:nvSpPr>
+          <p:cNvPr id="2" name="TextBox 1"/>
+          <p:cNvSpPr txBox="1"/>
+          <p:nvPr/>
+        </p:nvSpPr>
+        <p:spPr>
+          <a:xfrm>
+            <a:off x="609600" y="381000"/>
+            <a:ext cx="10972800" cy="609600"/>
+          </a:xfrm>
+          <a:prstGeom prst="rect">
+            <a:avLst/>
+          </a:prstGeom>
+          <a:noFill/>
+        </p:spPr>
+        <p:txBody>
+          <a:bodyPr wrap="square" lIns="0" rIns="0" tIns="0" bIns="0">
+            <a:spAutoFit/>
+          </a:bodyPr>
+          <a:lstStyle/>
+          <a:p>
+            <a:pPr>
+              <a:spcAft>
+                <a:spcPts val="300"/>
+              </a:spcAft>
+              <a:defRPr sz="2800" b="1">
+                <a:solidFill>
+                  <a:srgbClr val="14324F"/>
+                </a:solidFill>
+                <a:latin typeface="Calibri"/>
+              </a:defRPr>
+            </a:pPr>
+            <a:r>
               <a:t>Native cache defect: before linking, not in Cargo replay</a:t>
             </a:r>
           </a:p>
@@ -14050,587 +14631,6 @@
         </p:txBody>
       </p:sp>
     </p:spTree>
-  </p:cSld>
-  <p:clrMapOvr>
-    <a:masterClrMapping/>
-  </p:clrMapOvr>
-</p:sld>
-</file>
-
-<file path=ppt/slides/slide9.xml><?xml version="1.0" encoding="utf-8"?>
-<p:sld xmlns:a="http://schemas.openxmlformats.org/drawingml/2006/main" xmlns:r="http://schemas.openxmlformats.org/officeDocument/2006/relationships" xmlns:p="http://schemas.openxmlformats.org/presentationml/2006/main">
-  <p:cSld>
-    <p:bg>
-      <p:bgPr>
-        <a:solidFill>
-          <a:srgbClr val="FFFFFF"/>
-        </a:solidFill>
-        <a:effectLst/>
-      </p:bgPr>
-    </p:bg>
-    <p:spTree>
-      <p:nvGrpSpPr>
-        <p:cNvPr id="1" name=""/>
-        <p:cNvGrpSpPr/>
-        <p:nvPr/>
-      </p:nvGrpSpPr>
-      <p:grpSpPr>
-        <a:xfrm>
-          <a:off x="0" y="0"/>
-          <a:ext cx="0" cy="0"/>
-          <a:chOff x="0" y="0"/>
-          <a:chExt cx="0" cy="0"/>
-        </a:xfrm>
-      </p:grpSpPr>
-      <p:sp>
-        <p:nvSpPr>
-          <p:cNvPr id="2" name="Title">
-            <a:extLst>
-              <a:ext uri="{FF2B5EF4-FFF2-40B4-BE49-F238E27FC236}">
-                <a16:creationId xmlns:a16="http://schemas.microsoft.com/office/drawing/2014/main" id="{D9269D70-788E-602B-37CD-E93016D5A5BF}"/>
-              </a:ext>
-            </a:extLst>
-          </p:cNvPr>
-          <p:cNvSpPr txBox="1"/>
-          <p:nvPr/>
-        </p:nvSpPr>
-        <p:spPr>
-          <a:xfrm>
-            <a:off x="609600" y="380999"/>
-            <a:ext cx="10972800" cy="584200"/>
-          </a:xfrm>
-          <a:prstGeom prst="rect">
-            <a:avLst/>
-          </a:prstGeom>
-          <a:noFill/>
-        </p:spPr>
-        <p:txBody>
-          <a:bodyPr vert="horz" wrap="square" lIns="0" tIns="0" rIns="0" bIns="0" rtlCol="0">
-            <a:noAutofit/>
-          </a:bodyPr>
-          <a:lstStyle/>
-          <a:p>
-            <a:pPr>
-              <a:spcAft>
-                <a:spcPts val="300"/>
-              </a:spcAft>
-              <a:defRPr sz="2900" b="1">
-                <a:solidFill>
-                  <a:srgbClr val="14324F"/>
-                </a:solidFill>
-                <a:latin typeface="Calibri"/>
-              </a:defRPr>
-            </a:pPr>
-            <a:r>
-              <a:t>Priorities: fix profile-aware caching, then qualify</a:t>
-            </a:r>
-            <a:endParaRPr lang="en-GB" sz="3100" b="1" dirty="0">
-              <a:solidFill>
-                <a:srgbClr val="14324F"/>
-              </a:solidFill>
-              <a:latin typeface="Calibri" panose="020F0502020204030204" pitchFamily="34" charset="0"/>
-            </a:endParaRPr>
-          </a:p>
-        </p:txBody>
-      </p:sp>
-      <p:sp>
-        <p:nvSpPr>
-          <p:cNvPr id="4" name="Rectangle 3">
-            <a:extLst>
-              <a:ext uri="{FF2B5EF4-FFF2-40B4-BE49-F238E27FC236}">
-                <a16:creationId xmlns:a16="http://schemas.microsoft.com/office/drawing/2014/main" id="{A10E80BC-7F79-8413-B483-F42981415F79}"/>
-              </a:ext>
-            </a:extLst>
-          </p:cNvPr>
-          <p:cNvSpPr/>
-          <p:nvPr/>
-        </p:nvSpPr>
-        <p:spPr>
-          <a:xfrm>
-            <a:off x="609600" y="1096254"/>
-            <a:ext cx="10972800" cy="38100"/>
-          </a:xfrm>
-          <a:prstGeom prst="rect">
-            <a:avLst/>
-          </a:prstGeom>
-          <a:solidFill>
-            <a:srgbClr val="007F8B"/>
-          </a:solidFill>
-          <a:ln w="19050" cap="flat" cmpd="sng" algn="ctr">
-            <a:noFill/>
-            <a:prstDash val="solid"/>
-            <a:miter lim="800000"/>
-          </a:ln>
-          <a:effectLst/>
-          <a:extLst>
-            <a:ext uri="{91240B29-F687-4F45-9708-019B960494DF}">
-              <a14:hiddenLine xmlns:a14="http://schemas.microsoft.com/office/drawing/2010/main" w="19050" cap="flat" cmpd="sng" algn="ctr">
-                <a:solidFill>
-                  <a:schemeClr val="accent1">
-                    <a:shade val="15000"/>
-                  </a:schemeClr>
-                </a:solidFill>
-                <a:prstDash val="solid"/>
-                <a:miter lim="800000"/>
-              </a14:hiddenLine>
-            </a:ext>
-          </a:extLst>
-        </p:spPr>
-        <p:style>
-          <a:lnRef idx="2">
-            <a:schemeClr val="accent1">
-              <a:shade val="15000"/>
-            </a:schemeClr>
-          </a:lnRef>
-          <a:fillRef idx="1">
-            <a:schemeClr val="accent1"/>
-          </a:fillRef>
-          <a:effectRef idx="0">
-            <a:schemeClr val="accent1"/>
-          </a:effectRef>
-          <a:fontRef idx="minor">
-            <a:schemeClr val="lt1"/>
-          </a:fontRef>
-        </p:style>
-        <p:txBody>
-          <a:bodyPr rtlCol="0" anchor="ctr"/>
-          <a:lstStyle/>
-          <a:p>
-            <a:pPr algn="ctr"/>
-            <a:endParaRPr lang="en-GB"/>
-          </a:p>
-        </p:txBody>
-      </p:sp>
-      <p:sp>
-        <p:nvSpPr>
-          <p:cNvPr id="5" name="Priorities">
-            <a:extLst>
-              <a:ext uri="{FF2B5EF4-FFF2-40B4-BE49-F238E27FC236}">
-                <a16:creationId xmlns:a16="http://schemas.microsoft.com/office/drawing/2014/main" id="{738DB233-2DA8-E890-5A59-4528F1700761}"/>
-              </a:ext>
-            </a:extLst>
-          </p:cNvPr>
-          <p:cNvSpPr txBox="1"/>
-          <p:nvPr/>
-        </p:nvSpPr>
-        <p:spPr>
-          <a:xfrm>
-            <a:off x="609600" y="1422400"/>
-            <a:ext cx="10972800" cy="2705100"/>
-          </a:xfrm>
-          <a:prstGeom prst="rect">
-            <a:avLst/>
-          </a:prstGeom>
-          <a:noFill/>
-        </p:spPr>
-        <p:txBody>
-          <a:bodyPr vert="horz" wrap="square" lIns="0" tIns="0" rIns="0" bIns="0" rtlCol="0">
-            <a:noAutofit/>
-          </a:bodyPr>
-          <a:lstStyle/>
-          <a:p>
-            <a:pPr>
-              <a:spcAft>
-                <a:spcPts val="300"/>
-              </a:spcAft>
-              <a:defRPr sz="2100" b="0">
-                <a:solidFill>
-                  <a:srgbClr val="14324F"/>
-                </a:solidFill>
-                <a:latin typeface="Calibri"/>
-              </a:defRPr>
-            </a:pPr>
-            <a:pPr>
-              <a:spcAft>
-                <a:spcPts val="300"/>
-              </a:spcAft>
-              <a:defRPr sz="2100" b="0">
-                <a:solidFill>
-                  <a:srgbClr val="14324F"/>
-                </a:solidFill>
-                <a:latin typeface="Calibri"/>
-              </a:defRPr>
-            </a:pPr>
-            <a:r>
-              <a:t>1  Make final LLVM native cache keys profile-aware; demonstrate IronRDP recovery.</a:t>
-            </a:r>
-          </a:p>
-          <a:p>
-            <a:pPr>
-              <a:spcAft>
-                <a:spcPts val="300"/>
-              </a:spcAft>
-              <a:defRPr sz="2100" b="0">
-                <a:solidFill>
-                  <a:srgbClr val="14324F"/>
-                </a:solidFill>
-                <a:latin typeface="Calibri"/>
-              </a:defRPr>
-            </a:pPr>
-            <a:r>
-              <a:t>2  Deliver effective PGO while retaining the Microsoft tool stack.</a:t>
-            </a:r>
-          </a:p>
-          <a:p>
-            <a:pPr>
-              <a:spcAft>
-                <a:spcPts val="300"/>
-              </a:spcAft>
-              <a:defRPr sz="2100" b="0">
-                <a:solidFill>
-                  <a:srgbClr val="14324F"/>
-                </a:solidFill>
-                <a:latin typeface="Calibri"/>
-              </a:defRPr>
-            </a:pPr>
-            <a:r>
-              <a:t>3  Complete the running x64 NVMe 16 / 8 / 4-LP release comparison.</a:t>
-            </a:r>
-          </a:p>
-          <a:p>
-            <a:pPr>
-              <a:spcAft>
-                <a:spcPts val="300"/>
-              </a:spcAft>
-              <a:defRPr sz="2100" b="0">
-                <a:solidFill>
-                  <a:srgbClr val="14324F"/>
-                </a:solidFill>
-                <a:latin typeface="Calibri"/>
-              </a:defRPr>
-            </a:pPr>
-            <a:r>
-              <a:t>4  Reassess Rust-only ThinLTO after the null x64 pilot; Arm64 is unmeasured.</a:t>
-            </a:r>
-          </a:p>
-          <a:p>
-            <a:pPr>
-              <a:spcAft>
-                <a:spcPts val="300"/>
-              </a:spcAft>
-              <a:defRPr sz="2100" b="0">
-                <a:solidFill>
-                  <a:srgbClr val="14324F"/>
-                </a:solidFill>
-                <a:latin typeface="Calibri"/>
-              </a:defRPr>
-            </a:pPr>
-            <a:r>
-              <a:t>5  Optimize packaging and qualify the complete hosted production path.</a:t>
-            </a:r>
-          </a:p>
-        </p:txBody>
-      </p:sp>
-      <p:sp>
-        <p:nvSpPr>
-          <p:cNvPr id="6" name="Conclusion">
-            <a:extLst>
-              <a:ext uri="{FF2B5EF4-FFF2-40B4-BE49-F238E27FC236}">
-                <a16:creationId xmlns:a16="http://schemas.microsoft.com/office/drawing/2014/main" id="{0AA81700-1223-2717-9C99-D48DCB4261EF}"/>
-              </a:ext>
-            </a:extLst>
-          </p:cNvPr>
-          <p:cNvSpPr txBox="1"/>
-          <p:nvPr/>
-        </p:nvSpPr>
-        <p:spPr>
-          <a:xfrm>
-            <a:off x="609600" y="4394200"/>
-            <a:ext cx="10972800" cy="1181100"/>
-          </a:xfrm>
-          <a:prstGeom prst="rect">
-            <a:avLst/>
-          </a:prstGeom>
-          <a:noFill/>
-        </p:spPr>
-        <p:txBody>
-          <a:bodyPr vert="horz" wrap="square" lIns="0" tIns="0" rIns="0" bIns="0" rtlCol="0">
-            <a:noAutofit/>
-          </a:bodyPr>
-          <a:lstStyle/>
-          <a:p>
-            <a:pPr>
-              <a:spcAft>
-                <a:spcPts val="300"/>
-              </a:spcAft>
-              <a:defRPr sz="1800" b="0">
-                <a:solidFill>
-                  <a:srgbClr val="007F8B"/>
-                </a:solidFill>
-                <a:latin typeface="Calibri"/>
-              </a:defRPr>
-            </a:pPr>
-            <a:r>
-              <a:t>Open PRs (30 October): Rust #164707 / #165138; sccache #2962.</a:t>
-            </a:r>
-          </a:p>
-          <a:p>
-            <a:pPr>
-              <a:spcAft>
-                <a:spcPts val="300"/>
-              </a:spcAft>
-              <a:defRPr sz="1800" b="0">
-                <a:solidFill>
-                  <a:srgbClr val="007F8B"/>
-                </a:solidFill>
-                <a:latin typeface="Calibri"/>
-              </a:defRPr>
-            </a:pPr>
-            <a:r>
-              <a:t>The cached upstream job took 2h19m30s; corrected cold-build time is unmeasured.</a:t>
-            </a:r>
-          </a:p>
-          <a:p>
-            <a:pPr>
-              <a:spcAft>
-                <a:spcPts val="300"/>
-              </a:spcAft>
-              <a:defRPr sz="1800" b="0">
-                <a:solidFill>
-                  <a:srgbClr val="007F8B"/>
-                </a:solidFill>
-                <a:latin typeface="Calibri"/>
-              </a:defRPr>
-            </a:pPr>
-            <a:r>
-              <a:t>No claim yet of restored official performance or a qualified sub-six-hour release.</a:t>
-            </a:r>
-          </a:p>
-        </p:txBody>
-      </p:sp>
-      <p:sp>
-        <p:nvSpPr>
-          <p:cNvPr id="9" name="Evidence">
-            <a:hlinkClick r:id="rId2"/>
-            <a:extLst>
-              <a:ext uri="{FF2B5EF4-FFF2-40B4-BE49-F238E27FC236}">
-                <a16:creationId xmlns:a16="http://schemas.microsoft.com/office/drawing/2014/main" id="{F378CBC7-9ED3-A348-8BA2-C7A6609D8883}"/>
-              </a:ext>
-            </a:extLst>
-          </p:cNvPr>
-          <p:cNvSpPr txBox="1"/>
-          <p:nvPr/>
-        </p:nvSpPr>
-        <p:spPr>
-          <a:xfrm>
-            <a:off x="609600" y="6477000"/>
-            <a:ext cx="10414000" cy="228600"/>
-          </a:xfrm>
-          <a:prstGeom prst="rect">
-            <a:avLst/>
-          </a:prstGeom>
-          <a:noFill/>
-        </p:spPr>
-        <p:txBody>
-          <a:bodyPr vert="horz" wrap="square" lIns="0" tIns="0" rIns="0" bIns="0" rtlCol="0">
-            <a:noAutofit/>
-          </a:bodyPr>
-          <a:lstStyle/>
-          <a:p>
-            <a:r>
-              <a:rPr lang="en-US" sz="1000">
-                <a:solidFill>
-                  <a:srgbClr val="506072"/>
-                </a:solidFill>
-                <a:latin typeface="Calibri" panose="020F0502020204030204" pitchFamily="34" charset="0"/>
-              </a:rPr>
-              <a:t>Combined report: methods, detailed tables, qualification caveats and source links</a:t>
-            </a:r>
-            <a:endParaRPr lang="en-GB" sz="1000">
-              <a:solidFill>
-                <a:srgbClr val="506072"/>
-              </a:solidFill>
-              <a:latin typeface="Calibri" panose="020F0502020204030204" pitchFamily="34" charset="0"/>
-            </a:endParaRPr>
-          </a:p>
-        </p:txBody>
-      </p:sp>
-      <p:sp>
-        <p:nvSpPr>
-          <p:cNvPr id="10" name="Slide number">
-            <a:extLst>
-              <a:ext uri="{FF2B5EF4-FFF2-40B4-BE49-F238E27FC236}">
-                <a16:creationId xmlns:a16="http://schemas.microsoft.com/office/drawing/2014/main" id="{69C7B1B7-9211-A806-55BB-C6F259CC6888}"/>
-              </a:ext>
-            </a:extLst>
-          </p:cNvPr>
-          <p:cNvSpPr txBox="1"/>
-          <p:nvPr/>
-        </p:nvSpPr>
-        <p:spPr>
-          <a:xfrm>
-            <a:off x="11150600" y="6477000"/>
-            <a:ext cx="635000" cy="228600"/>
-          </a:xfrm>
-          <a:prstGeom prst="rect">
-            <a:avLst/>
-          </a:prstGeom>
-          <a:noFill/>
-        </p:spPr>
-        <p:txBody>
-          <a:bodyPr vert="horz" wrap="square" lIns="0" tIns="0" rIns="0" bIns="0" rtlCol="0">
-            <a:noAutofit/>
-          </a:bodyPr>
-          <a:lstStyle/>
-          <a:p>
-            <a:pPr>
-              <a:spcAft>
-                <a:spcPts val="300"/>
-              </a:spcAft>
-              <a:defRPr sz="1000" b="0">
-                <a:solidFill>
-                  <a:srgbClr val="506072"/>
-                </a:solidFill>
-                <a:latin typeface="Calibri"/>
-              </a:defRPr>
-            </a:pPr>
-            <a:pPr>
-              <a:spcAft>
-                <a:spcPts val="300"/>
-              </a:spcAft>
-              <a:defRPr sz="1000" b="0">
-                <a:solidFill>
-                  <a:srgbClr val="506072"/>
-                </a:solidFill>
-                <a:latin typeface="Calibri"/>
-              </a:defRPr>
-            </a:pPr>
-            <a:r>
-              <a:rPr sz="1000"/>
-              <a:t>10 / 14</a:t>
-            </a:r>
-          </a:p>
-        </p:txBody>
-      </p:sp>
-      <p:sp>
-        <p:nvSpPr>
-          <p:cNvPr id="11" name="TextBox 10">
-            <a:hlinkClick r:id="rId3"/>
-          </p:cNvPr>
-          <p:cNvSpPr txBox="1"/>
-          <p:nvPr/>
-        </p:nvSpPr>
-        <p:spPr>
-          <a:xfrm>
-            <a:off x="609600" y="5816600"/>
-            <a:ext cx="3302000" cy="317500"/>
-          </a:xfrm>
-          <a:prstGeom prst="rect">
-            <a:avLst/>
-          </a:prstGeom>
-          <a:noFill/>
-        </p:spPr>
-        <p:txBody>
-          <a:bodyPr wrap="square" lIns="0" rIns="0" tIns="0" bIns="0">
-            <a:spAutoFit/>
-          </a:bodyPr>
-          <a:lstStyle/>
-          <a:p>
-            <a:pPr>
-              <a:spcAft>
-                <a:spcPts val="300"/>
-              </a:spcAft>
-              <a:defRPr sz="1600" b="0">
-                <a:solidFill>
-                  <a:srgbClr val="007F8B"/>
-                </a:solidFill>
-                <a:latin typeface="Calibri"/>
-              </a:defRPr>
-            </a:pPr>
-            <a:r>
-              <a:t>Rust #164707</a:t>
-            </a:r>
-          </a:p>
-        </p:txBody>
-      </p:sp>
-      <p:sp>
-        <p:nvSpPr>
-          <p:cNvPr id="12" name="TextBox 11">
-            <a:hlinkClick r:id="rId4"/>
-          </p:cNvPr>
-          <p:cNvSpPr txBox="1"/>
-          <p:nvPr/>
-        </p:nvSpPr>
-        <p:spPr>
-          <a:xfrm>
-            <a:off x="4229100" y="5816600"/>
-            <a:ext cx="3302000" cy="317500"/>
-          </a:xfrm>
-          <a:prstGeom prst="rect">
-            <a:avLst/>
-          </a:prstGeom>
-          <a:noFill/>
-        </p:spPr>
-        <p:txBody>
-          <a:bodyPr wrap="square" lIns="0" rIns="0" tIns="0" bIns="0">
-            <a:spAutoFit/>
-          </a:bodyPr>
-          <a:lstStyle/>
-          <a:p>
-            <a:pPr>
-              <a:spcAft>
-                <a:spcPts val="300"/>
-              </a:spcAft>
-              <a:defRPr sz="1600" b="0">
-                <a:solidFill>
-                  <a:srgbClr val="007F8B"/>
-                </a:solidFill>
-                <a:latin typeface="Calibri"/>
-              </a:defRPr>
-            </a:pPr>
-            <a:r>
-              <a:t>Rust #165138</a:t>
-            </a:r>
-          </a:p>
-        </p:txBody>
-      </p:sp>
-      <p:sp>
-        <p:nvSpPr>
-          <p:cNvPr id="13" name="TextBox 12">
-            <a:hlinkClick r:id="rId5"/>
-          </p:cNvPr>
-          <p:cNvSpPr txBox="1"/>
-          <p:nvPr/>
-        </p:nvSpPr>
-        <p:spPr>
-          <a:xfrm>
-            <a:off x="7848600" y="5816600"/>
-            <a:ext cx="3302000" cy="317500"/>
-          </a:xfrm>
-          <a:prstGeom prst="rect">
-            <a:avLst/>
-          </a:prstGeom>
-          <a:noFill/>
-        </p:spPr>
-        <p:txBody>
-          <a:bodyPr wrap="square" lIns="0" rIns="0" tIns="0" bIns="0">
-            <a:spAutoFit/>
-          </a:bodyPr>
-          <a:lstStyle/>
-          <a:p>
-            <a:pPr>
-              <a:spcAft>
-                <a:spcPts val="300"/>
-              </a:spcAft>
-              <a:defRPr sz="1600" b="0">
-                <a:solidFill>
-                  <a:srgbClr val="007F8B"/>
-                </a:solidFill>
-                <a:latin typeface="Calibri"/>
-              </a:defRPr>
-            </a:pPr>
-            <a:r>
-              <a:t>sccache #2962</a:t>
-            </a:r>
-          </a:p>
-        </p:txBody>
-      </p:sp>
-    </p:spTree>
-    <p:extLst>
-      <p:ext uri="{BB962C8B-B14F-4D97-AF65-F5344CB8AC3E}">
-        <p14:creationId xmlns:p14="http://schemas.microsoft.com/office/powerpoint/2010/main" val="967713318"/>
-      </p:ext>
-    </p:extLst>
   </p:cSld>
   <p:clrMapOvr>
     <a:masterClrMapping/>
